--- a/docs/WG立ち上げガイド/02_パソコンの準備.pptx
+++ b/docs/WG立ち上げガイド/02_パソコンの準備.pptx
@@ -7808,7 +7808,7 @@
                 <a:ea typeface="Meiryo" pitchFamily="34" charset="-122"/>
                 <a:cs typeface="Meiryo" pitchFamily="34" charset="-120"/>
               </a:rPr>
-              <a:t>github.com の「Sign up」。本名や学籍番号は使わない</a:t>
+              <a:t>github.com の「Sign up」。本名でもよい。学籍番号は使わない</a:t>
             </a:r>
             <a:endParaRPr lang="en-US" sz="1050" dirty="0"/>
           </a:p>
@@ -7911,7 +7911,7 @@
                 <a:ea typeface="Meiryo" pitchFamily="34" charset="-122"/>
                 <a:cs typeface="Meiryo" pitchFamily="34" charset="-120"/>
               </a:rPr>
-              <a:t>ユーザー名を運営に伝える</a:t>
+              <a:t>ユーザー名と名前を運営に伝える</a:t>
             </a:r>
             <a:endParaRPr lang="en-US" sz="1250" dirty="0"/>
           </a:p>

--- a/docs/WG立ち上げガイド/02_パソコンの準備.pptx
+++ b/docs/WG立ち上げガイド/02_パソコンの準備.pptx
@@ -7911,7 +7911,7 @@
                 <a:ea typeface="Meiryo" pitchFamily="34" charset="-122"/>
                 <a:cs typeface="Meiryo" pitchFamily="34" charset="-120"/>
               </a:rPr>
-              <a:t>ユーザー名と名前を運営に伝える</a:t>
+              <a:t>ユーザー名を運営に伝える</a:t>
             </a:r>
             <a:endParaRPr lang="en-US" sz="1250" dirty="0"/>
           </a:p>

--- a/docs/WG立ち上げガイド/02_パソコンの準備.pptx
+++ b/docs/WG立ち上げガイド/02_パソコンの準備.pptx
@@ -17,9 +17,10 @@
     <p:sldId id="265" r:id="rId11"/>
     <p:sldId id="266" r:id="rId12"/>
     <p:sldId id="267" r:id="rId13"/>
+    <p:sldId id="268" r:id="rId14"/>
   </p:sldIdLst>
   <p:notesMasterIdLst>
-    <p:notesMasterId r:id="rId14"/>
+    <p:notesMasterId r:id="rId15"/>
   </p:notesMasterIdLst>
   <p:sldSz cx="9144000" cy="5143500"/>
   <p:notesSz cx="5143500" cy="9144000"/>
@@ -601,7 +602,7 @@
           <a:p>
             <a:r>
               <a:rPr lang="en-US" dirty="0"/>
-              <a:t>コマンド パレットは英語で入力しても日本語の項目が出てきます。ソースはパソコンのフォルダーではなく Docker の中に置かれるので、エクスプローラーや Finder には出てきません。</a:t>
+              <a:t>クローンは、GitHub にあるリポジトリを自分の作業部屋に写してくることです。チェックアウトとも言います。写したものを直して、コミットして GitHub に送り返します（資料 03）。一度クローンすれば、次からは VS Code の「最近使用した項目」から開けます。</a:t>
             </a:r>
             <a:endParaRPr lang="en-US" dirty="0"/>
           </a:p>
@@ -689,7 +690,7 @@
           <a:p>
             <a:r>
               <a:rPr lang="en-US" dirty="0"/>
-              <a:t>ここまでで準備は終わりです。毎日の始め方と変更の届け方は、資料 03 にあります。</a:t>
+              <a:t>コマンド パレットは英語で入力しても日本語の項目が出てきます。ソースはパソコンのフォルダーではなく Docker の中に置かれるので、エクスプローラーや Finder には出てきません。</a:t>
             </a:r>
             <a:endParaRPr lang="en-US" dirty="0"/>
           </a:p>
@@ -777,7 +778,7 @@
           <a:p>
             <a:r>
               <a:rPr lang="en-US" dirty="0"/>
-              <a:t>詳しい対処は homepage の docs/development.md の「困ったとき」にあります。</a:t>
+              <a:t>ここまでで準備は終わりです。毎日の始め方と変更の届け方は、資料 03 にあります。</a:t>
             </a:r>
             <a:endParaRPr lang="en-US" dirty="0"/>
           </a:p>
@@ -801,6 +802,94 @@
             <a:fld id="{F7021451-1387-4CA6-816F-3879F97B5CBC}" type="slidenum">
               <a:rPr lang="en-US"/>
               <a:t>12</a:t>
+            </a:fld>
+            <a:endParaRPr lang="en-US"/>
+          </a:p>
+        </p:txBody>
+      </p:sp>
+    </p:spTree>
+    <p:extLst>
+      <p:ext uri="{BB962C8B-B14F-4D97-AF65-F5344CB8AC3E}">
+        <p14:creationId xmlns:p14="http://schemas.microsoft.com/office/powerpoint/2010/main" val="1024086991"/>
+      </p:ext>
+    </p:extLst>
+  </p:cSld>
+  <p:clrMapOvr>
+    <a:masterClrMapping/>
+  </p:clrMapOvr>
+</p:notes>
+</file>
+
+<file path=ppt/notesSlides/notesSlide13.xml><?xml version="1.0" encoding="utf-8"?>
+<p:notes xmlns:a="http://schemas.openxmlformats.org/drawingml/2006/main" xmlns:r="http://schemas.openxmlformats.org/officeDocument/2006/relationships" xmlns:p="http://schemas.openxmlformats.org/presentationml/2006/main">
+  <p:cSld>
+    <p:spTree>
+      <p:nvGrpSpPr>
+        <p:cNvPr id="1" name=""/>
+        <p:cNvGrpSpPr/>
+        <p:nvPr/>
+      </p:nvGrpSpPr>
+      <p:grpSpPr>
+        <a:xfrm>
+          <a:off x="0" y="0"/>
+          <a:ext cx="0" cy="0"/>
+          <a:chOff x="0" y="0"/>
+          <a:chExt cx="0" cy="0"/>
+        </a:xfrm>
+      </p:grpSpPr>
+      <p:sp>
+        <p:nvSpPr>
+          <p:cNvPr id="2" name="Slide Image Placeholder 1"/>
+          <p:cNvSpPr>
+            <a:spLocks noGrp="1" noRot="1" noChangeAspect="1"/>
+          </p:cNvSpPr>
+          <p:nvPr>
+            <p:ph type="sldImg"/>
+          </p:nvPr>
+        </p:nvSpPr>
+        <p:spPr/>
+      </p:sp>
+      <p:sp>
+        <p:nvSpPr>
+          <p:cNvPr id="3" name="Notes Placeholder 2"/>
+          <p:cNvSpPr>
+            <a:spLocks noGrp="1"/>
+          </p:cNvSpPr>
+          <p:nvPr>
+            <p:ph type="body" idx="1"/>
+          </p:nvPr>
+        </p:nvSpPr>
+        <p:spPr/>
+        <p:txBody>
+          <a:bodyPr/>
+          <a:lstStyle/>
+          <a:p>
+            <a:r>
+              <a:rPr lang="en-US" dirty="0"/>
+              <a:t>詳しい対処は homepage の docs/development.md の「困ったとき」にあります。</a:t>
+            </a:r>
+            <a:endParaRPr lang="en-US" dirty="0"/>
+          </a:p>
+        </p:txBody>
+      </p:sp>
+      <p:sp>
+        <p:nvSpPr>
+          <p:cNvPr id="4" name="Slide Number Placeholder 3"/>
+          <p:cNvSpPr>
+            <a:spLocks noGrp="1"/>
+          </p:cNvSpPr>
+          <p:nvPr>
+            <p:ph type="sldNum" sz="quarter" idx="10"/>
+          </p:nvPr>
+        </p:nvSpPr>
+        <p:spPr/>
+        <p:txBody>
+          <a:bodyPr/>
+          <a:lstStyle/>
+          <a:p>
+            <a:fld id="{F7021451-1387-4CA6-816F-3879F97B5CBC}" type="slidenum">
+              <a:rPr lang="en-US"/>
+              <a:t>13</a:t>
             </a:fld>
             <a:endParaRPr lang="en-US"/>
           </a:p>
@@ -2718,7 +2807,7 @@
                 <a:ea typeface="Consolas" pitchFamily="34" charset="-122"/>
                 <a:cs typeface="Consolas" pitchFamily="34" charset="-120"/>
               </a:rPr>
-              <a:t>// 02  ·  手順 7 / 8</a:t>
+              <a:t>// 02  ·  手順 7 / 8（1 / 2）</a:t>
             </a:r>
             <a:endParaRPr lang="en-US" sz="1100" dirty="0"/>
           </a:p>
@@ -2757,7 +2846,7 @@
                 <a:ea typeface="Meiryo" pitchFamily="34" charset="-122"/>
                 <a:cs typeface="Meiryo" pitchFamily="34" charset="-120"/>
               </a:rPr>
-              <a:t>リポジトリを開く</a:t>
+              <a:t>リポジトリの URL をコピーする</a:t>
             </a:r>
             <a:endParaRPr lang="en-US" sz="2600" dirty="0"/>
           </a:p>
@@ -2771,728 +2860,18 @@
         </p:nvSpPr>
         <p:spPr>
           <a:xfrm>
-            <a:off x="457200" y="1371600"/>
-            <a:ext cx="310896" cy="310896"/>
-          </a:xfrm>
-          <a:prstGeom prst="ellipse">
+            <a:off x="457200" y="1325880"/>
+            <a:ext cx="4343400" cy="1188720"/>
+          </a:xfrm>
+          <a:prstGeom prst="rect">
             <a:avLst/>
           </a:prstGeom>
           <a:solidFill>
-            <a:srgbClr val="001E3C"/>
+            <a:srgbClr val="FFFFFF"/>
           </a:solidFill>
           <a:ln w="12700">
             <a:solidFill>
-              <a:srgbClr val="001E3C"/>
-            </a:solidFill>
-            <a:prstDash val="solid"/>
-          </a:ln>
-        </p:spPr>
-      </p:sp>
-      <p:sp>
-        <p:nvSpPr>
-          <p:cNvPr id="5" name="Text 3"/>
-          <p:cNvSpPr txBox="1"/>
-          <p:nvPr/>
-        </p:nvSpPr>
-        <p:spPr>
-          <a:xfrm>
-            <a:off x="457200" y="1371600"/>
-            <a:ext cx="310896" cy="310896"/>
-          </a:xfrm>
-          <a:prstGeom prst="rect">
-            <a:avLst/>
-          </a:prstGeom>
-          <a:noFill/>
-          <a:ln/>
-        </p:spPr>
-        <p:txBody>
-          <a:bodyPr wrap="square" lIns="0" tIns="0" rIns="0" bIns="0" rtlCol="0" anchor="ctr"/>
-          <a:lstStyle/>
-          <a:p>
-            <a:pPr algn="ctr" indent="0" marL="0">
-              <a:buNone/>
-            </a:pPr>
-            <a:r>
-              <a:rPr lang="en-US" sz="1100" b="1" dirty="0">
-                <a:solidFill>
-                  <a:srgbClr val="FFFFFF"/>
-                </a:solidFill>
-                <a:latin typeface="Consolas" pitchFamily="34" charset="0"/>
-                <a:ea typeface="Consolas" pitchFamily="34" charset="-122"/>
-                <a:cs typeface="Consolas" pitchFamily="34" charset="-120"/>
-              </a:rPr>
-              <a:t>1</a:t>
-            </a:r>
-            <a:endParaRPr lang="en-US" sz="1100" dirty="0"/>
-          </a:p>
-        </p:txBody>
-      </p:sp>
-      <p:sp>
-        <p:nvSpPr>
-          <p:cNvPr id="6" name="Text 4"/>
-          <p:cNvSpPr txBox="1"/>
-          <p:nvPr/>
-        </p:nvSpPr>
-        <p:spPr>
-          <a:xfrm>
-            <a:off x="896112" y="1380744"/>
-            <a:ext cx="3858768" cy="274320"/>
-          </a:xfrm>
-          <a:prstGeom prst="rect">
-            <a:avLst/>
-          </a:prstGeom>
-          <a:noFill/>
-          <a:ln/>
-        </p:spPr>
-        <p:txBody>
-          <a:bodyPr wrap="square" lIns="0" tIns="0" rIns="0" bIns="0" rtlCol="0" anchor="t"/>
-          <a:lstStyle/>
-          <a:p>
-            <a:pPr indent="0" marL="0">
-              <a:buNone/>
-            </a:pPr>
-            <a:r>
-              <a:rPr lang="en-US" sz="1250" b="1" dirty="0">
-                <a:solidFill>
-                  <a:srgbClr val="001E3C"/>
-                </a:solidFill>
-                <a:latin typeface="Meiryo" pitchFamily="34" charset="0"/>
-                <a:ea typeface="Meiryo" pitchFamily="34" charset="-122"/>
-                <a:cs typeface="Meiryo" pitchFamily="34" charset="-120"/>
-              </a:rPr>
-              <a:t>Docker Desktop を起動しておく</a:t>
-            </a:r>
-            <a:endParaRPr lang="en-US" sz="1250" dirty="0"/>
-          </a:p>
-        </p:txBody>
-      </p:sp>
-      <p:sp>
-        <p:nvSpPr>
-          <p:cNvPr id="7" name="Text 5"/>
-          <p:cNvSpPr txBox="1"/>
-          <p:nvPr/>
-        </p:nvSpPr>
-        <p:spPr>
-          <a:xfrm>
-            <a:off x="896112" y="1645920"/>
-            <a:ext cx="3858768" cy="347472"/>
-          </a:xfrm>
-          <a:prstGeom prst="rect">
-            <a:avLst/>
-          </a:prstGeom>
-          <a:noFill/>
-          <a:ln/>
-        </p:spPr>
-        <p:txBody>
-          <a:bodyPr wrap="square" lIns="0" tIns="0" rIns="0" bIns="0" rtlCol="0" anchor="t"/>
-          <a:lstStyle/>
-          <a:p>
-            <a:pPr indent="0" marL="0">
-              <a:buNone/>
-            </a:pPr>
-            <a:r>
-              <a:rPr lang="en-US" sz="1050" dirty="0">
-                <a:solidFill>
-                  <a:srgbClr val="1B2B3A"/>
-                </a:solidFill>
-                <a:latin typeface="Meiryo" pitchFamily="34" charset="0"/>
-                <a:ea typeface="Meiryo" pitchFamily="34" charset="-122"/>
-                <a:cs typeface="Meiryo" pitchFamily="34" charset="-120"/>
-              </a:rPr>
-              <a:t>左下が緑の Engine running になるまで待つ</a:t>
-            </a:r>
-            <a:endParaRPr lang="en-US" sz="1050" dirty="0"/>
-          </a:p>
-        </p:txBody>
-      </p:sp>
-      <p:sp>
-        <p:nvSpPr>
-          <p:cNvPr id="8" name="Shape 6"/>
-          <p:cNvSpPr/>
-          <p:nvPr/>
-        </p:nvSpPr>
-        <p:spPr>
-          <a:xfrm>
-            <a:off x="457200" y="2011680"/>
-            <a:ext cx="310896" cy="310896"/>
-          </a:xfrm>
-          <a:prstGeom prst="ellipse">
-            <a:avLst/>
-          </a:prstGeom>
-          <a:solidFill>
-            <a:srgbClr val="001E3C"/>
-          </a:solidFill>
-          <a:ln w="12700">
-            <a:solidFill>
-              <a:srgbClr val="001E3C"/>
-            </a:solidFill>
-            <a:prstDash val="solid"/>
-          </a:ln>
-        </p:spPr>
-      </p:sp>
-      <p:sp>
-        <p:nvSpPr>
-          <p:cNvPr id="9" name="Text 7"/>
-          <p:cNvSpPr txBox="1"/>
-          <p:nvPr/>
-        </p:nvSpPr>
-        <p:spPr>
-          <a:xfrm>
-            <a:off x="457200" y="2011680"/>
-            <a:ext cx="310896" cy="310896"/>
-          </a:xfrm>
-          <a:prstGeom prst="rect">
-            <a:avLst/>
-          </a:prstGeom>
-          <a:noFill/>
-          <a:ln/>
-        </p:spPr>
-        <p:txBody>
-          <a:bodyPr wrap="square" lIns="0" tIns="0" rIns="0" bIns="0" rtlCol="0" anchor="ctr"/>
-          <a:lstStyle/>
-          <a:p>
-            <a:pPr algn="ctr" indent="0" marL="0">
-              <a:buNone/>
-            </a:pPr>
-            <a:r>
-              <a:rPr lang="en-US" sz="1100" b="1" dirty="0">
-                <a:solidFill>
-                  <a:srgbClr val="FFFFFF"/>
-                </a:solidFill>
-                <a:latin typeface="Consolas" pitchFamily="34" charset="0"/>
-                <a:ea typeface="Consolas" pitchFamily="34" charset="-122"/>
-                <a:cs typeface="Consolas" pitchFamily="34" charset="-120"/>
-              </a:rPr>
-              <a:t>2</a:t>
-            </a:r>
-            <a:endParaRPr lang="en-US" sz="1100" dirty="0"/>
-          </a:p>
-        </p:txBody>
-      </p:sp>
-      <p:sp>
-        <p:nvSpPr>
-          <p:cNvPr id="10" name="Text 8"/>
-          <p:cNvSpPr txBox="1"/>
-          <p:nvPr/>
-        </p:nvSpPr>
-        <p:spPr>
-          <a:xfrm>
-            <a:off x="896112" y="2020824"/>
-            <a:ext cx="3858768" cy="274320"/>
-          </a:xfrm>
-          <a:prstGeom prst="rect">
-            <a:avLst/>
-          </a:prstGeom>
-          <a:noFill/>
-          <a:ln/>
-        </p:spPr>
-        <p:txBody>
-          <a:bodyPr wrap="square" lIns="0" tIns="0" rIns="0" bIns="0" rtlCol="0" anchor="t"/>
-          <a:lstStyle/>
-          <a:p>
-            <a:pPr indent="0" marL="0">
-              <a:buNone/>
-            </a:pPr>
-            <a:r>
-              <a:rPr lang="en-US" sz="1250" b="1" dirty="0">
-                <a:solidFill>
-                  <a:srgbClr val="001E3C"/>
-                </a:solidFill>
-                <a:latin typeface="Meiryo" pitchFamily="34" charset="0"/>
-                <a:ea typeface="Meiryo" pitchFamily="34" charset="-122"/>
-                <a:cs typeface="Meiryo" pitchFamily="34" charset="-120"/>
-              </a:rPr>
-              <a:t>「表示」→「コマンド パレット」</a:t>
-            </a:r>
-            <a:endParaRPr lang="en-US" sz="1250" dirty="0"/>
-          </a:p>
-        </p:txBody>
-      </p:sp>
-      <p:sp>
-        <p:nvSpPr>
-          <p:cNvPr id="11" name="Text 9"/>
-          <p:cNvSpPr txBox="1"/>
-          <p:nvPr/>
-        </p:nvSpPr>
-        <p:spPr>
-          <a:xfrm>
-            <a:off x="896112" y="2286000"/>
-            <a:ext cx="3858768" cy="347472"/>
-          </a:xfrm>
-          <a:prstGeom prst="rect">
-            <a:avLst/>
-          </a:prstGeom>
-          <a:noFill/>
-          <a:ln/>
-        </p:spPr>
-        <p:txBody>
-          <a:bodyPr wrap="square" lIns="0" tIns="0" rIns="0" bIns="0" rtlCol="0" anchor="t"/>
-          <a:lstStyle/>
-          <a:p>
-            <a:pPr indent="0" marL="0">
-              <a:buNone/>
-            </a:pPr>
-            <a:r>
-              <a:rPr lang="en-US" sz="1050" dirty="0">
-                <a:solidFill>
-                  <a:srgbClr val="1B2B3A"/>
-                </a:solidFill>
-                <a:latin typeface="Meiryo" pitchFamily="34" charset="0"/>
-                <a:ea typeface="Meiryo" pitchFamily="34" charset="-122"/>
-                <a:cs typeface="Meiryo" pitchFamily="34" charset="-120"/>
-              </a:rPr>
-              <a:t>Ctrl + Shift + P（Mac は Cmd + Shift + P）</a:t>
-            </a:r>
-            <a:endParaRPr lang="en-US" sz="1050" dirty="0"/>
-          </a:p>
-        </p:txBody>
-      </p:sp>
-      <p:sp>
-        <p:nvSpPr>
-          <p:cNvPr id="12" name="Shape 10"/>
-          <p:cNvSpPr/>
-          <p:nvPr/>
-        </p:nvSpPr>
-        <p:spPr>
-          <a:xfrm>
-            <a:off x="457200" y="2651760"/>
-            <a:ext cx="310896" cy="310896"/>
-          </a:xfrm>
-          <a:prstGeom prst="ellipse">
-            <a:avLst/>
-          </a:prstGeom>
-          <a:solidFill>
-            <a:srgbClr val="001E3C"/>
-          </a:solidFill>
-          <a:ln w="12700">
-            <a:solidFill>
-              <a:srgbClr val="001E3C"/>
-            </a:solidFill>
-            <a:prstDash val="solid"/>
-          </a:ln>
-        </p:spPr>
-      </p:sp>
-      <p:sp>
-        <p:nvSpPr>
-          <p:cNvPr id="13" name="Text 11"/>
-          <p:cNvSpPr txBox="1"/>
-          <p:nvPr/>
-        </p:nvSpPr>
-        <p:spPr>
-          <a:xfrm>
-            <a:off x="457200" y="2651760"/>
-            <a:ext cx="310896" cy="310896"/>
-          </a:xfrm>
-          <a:prstGeom prst="rect">
-            <a:avLst/>
-          </a:prstGeom>
-          <a:noFill/>
-          <a:ln/>
-        </p:spPr>
-        <p:txBody>
-          <a:bodyPr wrap="square" lIns="0" tIns="0" rIns="0" bIns="0" rtlCol="0" anchor="ctr"/>
-          <a:lstStyle/>
-          <a:p>
-            <a:pPr algn="ctr" indent="0" marL="0">
-              <a:buNone/>
-            </a:pPr>
-            <a:r>
-              <a:rPr lang="en-US" sz="1100" b="1" dirty="0">
-                <a:solidFill>
-                  <a:srgbClr val="FFFFFF"/>
-                </a:solidFill>
-                <a:latin typeface="Consolas" pitchFamily="34" charset="0"/>
-                <a:ea typeface="Consolas" pitchFamily="34" charset="-122"/>
-                <a:cs typeface="Consolas" pitchFamily="34" charset="-120"/>
-              </a:rPr>
-              <a:t>3</a:t>
-            </a:r>
-            <a:endParaRPr lang="en-US" sz="1100" dirty="0"/>
-          </a:p>
-        </p:txBody>
-      </p:sp>
-      <p:sp>
-        <p:nvSpPr>
-          <p:cNvPr id="14" name="Text 12"/>
-          <p:cNvSpPr txBox="1"/>
-          <p:nvPr/>
-        </p:nvSpPr>
-        <p:spPr>
-          <a:xfrm>
-            <a:off x="896112" y="2660904"/>
-            <a:ext cx="3858768" cy="274320"/>
-          </a:xfrm>
-          <a:prstGeom prst="rect">
-            <a:avLst/>
-          </a:prstGeom>
-          <a:noFill/>
-          <a:ln/>
-        </p:spPr>
-        <p:txBody>
-          <a:bodyPr wrap="square" lIns="0" tIns="0" rIns="0" bIns="0" rtlCol="0" anchor="t"/>
-          <a:lstStyle/>
-          <a:p>
-            <a:pPr indent="0" marL="0">
-              <a:buNone/>
-            </a:pPr>
-            <a:r>
-              <a:rPr lang="en-US" sz="1250" b="1" dirty="0">
-                <a:solidFill>
-                  <a:srgbClr val="001E3C"/>
-                </a:solidFill>
-                <a:latin typeface="Meiryo" pitchFamily="34" charset="0"/>
-                <a:ea typeface="Meiryo" pitchFamily="34" charset="-122"/>
-                <a:cs typeface="Meiryo" pitchFamily="34" charset="-120"/>
-              </a:rPr>
-              <a:t>Clone Repository in Container Volume</a:t>
-            </a:r>
-            <a:endParaRPr lang="en-US" sz="1250" dirty="0"/>
-          </a:p>
-        </p:txBody>
-      </p:sp>
-      <p:sp>
-        <p:nvSpPr>
-          <p:cNvPr id="15" name="Text 13"/>
-          <p:cNvSpPr txBox="1"/>
-          <p:nvPr/>
-        </p:nvSpPr>
-        <p:spPr>
-          <a:xfrm>
-            <a:off x="896112" y="2926080"/>
-            <a:ext cx="3858768" cy="347472"/>
-          </a:xfrm>
-          <a:prstGeom prst="rect">
-            <a:avLst/>
-          </a:prstGeom>
-          <a:noFill/>
-          <a:ln/>
-        </p:spPr>
-        <p:txBody>
-          <a:bodyPr wrap="square" lIns="0" tIns="0" rIns="0" bIns="0" rtlCol="0" anchor="t"/>
-          <a:lstStyle/>
-          <a:p>
-            <a:pPr indent="0" marL="0">
-              <a:buNone/>
-            </a:pPr>
-            <a:r>
-              <a:rPr lang="en-US" sz="1050" dirty="0">
-                <a:solidFill>
-                  <a:srgbClr val="1B2B3A"/>
-                </a:solidFill>
-                <a:latin typeface="Meiryo" pitchFamily="34" charset="0"/>
-                <a:ea typeface="Meiryo" pitchFamily="34" charset="-122"/>
-                <a:cs typeface="Meiryo" pitchFamily="34" charset="-120"/>
-              </a:rPr>
-              <a:t>と入力し、出てきた項目を選ぶ（右の画面）</a:t>
-            </a:r>
-            <a:endParaRPr lang="en-US" sz="1050" dirty="0"/>
-          </a:p>
-        </p:txBody>
-      </p:sp>
-      <p:sp>
-        <p:nvSpPr>
-          <p:cNvPr id="16" name="Shape 14"/>
-          <p:cNvSpPr/>
-          <p:nvPr/>
-        </p:nvSpPr>
-        <p:spPr>
-          <a:xfrm>
-            <a:off x="457200" y="3291840"/>
-            <a:ext cx="310896" cy="310896"/>
-          </a:xfrm>
-          <a:prstGeom prst="ellipse">
-            <a:avLst/>
-          </a:prstGeom>
-          <a:solidFill>
-            <a:srgbClr val="001E3C"/>
-          </a:solidFill>
-          <a:ln w="12700">
-            <a:solidFill>
-              <a:srgbClr val="001E3C"/>
-            </a:solidFill>
-            <a:prstDash val="solid"/>
-          </a:ln>
-        </p:spPr>
-      </p:sp>
-      <p:sp>
-        <p:nvSpPr>
-          <p:cNvPr id="17" name="Text 15"/>
-          <p:cNvSpPr txBox="1"/>
-          <p:nvPr/>
-        </p:nvSpPr>
-        <p:spPr>
-          <a:xfrm>
-            <a:off x="457200" y="3291840"/>
-            <a:ext cx="310896" cy="310896"/>
-          </a:xfrm>
-          <a:prstGeom prst="rect">
-            <a:avLst/>
-          </a:prstGeom>
-          <a:noFill/>
-          <a:ln/>
-        </p:spPr>
-        <p:txBody>
-          <a:bodyPr wrap="square" lIns="0" tIns="0" rIns="0" bIns="0" rtlCol="0" anchor="ctr"/>
-          <a:lstStyle/>
-          <a:p>
-            <a:pPr algn="ctr" indent="0" marL="0">
-              <a:buNone/>
-            </a:pPr>
-            <a:r>
-              <a:rPr lang="en-US" sz="1100" b="1" dirty="0">
-                <a:solidFill>
-                  <a:srgbClr val="FFFFFF"/>
-                </a:solidFill>
-                <a:latin typeface="Consolas" pitchFamily="34" charset="0"/>
-                <a:ea typeface="Consolas" pitchFamily="34" charset="-122"/>
-                <a:cs typeface="Consolas" pitchFamily="34" charset="-120"/>
-              </a:rPr>
-              <a:t>4</a:t>
-            </a:r>
-            <a:endParaRPr lang="en-US" sz="1100" dirty="0"/>
-          </a:p>
-        </p:txBody>
-      </p:sp>
-      <p:sp>
-        <p:nvSpPr>
-          <p:cNvPr id="18" name="Text 16"/>
-          <p:cNvSpPr txBox="1"/>
-          <p:nvPr/>
-        </p:nvSpPr>
-        <p:spPr>
-          <a:xfrm>
-            <a:off x="896112" y="3300984"/>
-            <a:ext cx="3858768" cy="274320"/>
-          </a:xfrm>
-          <a:prstGeom prst="rect">
-            <a:avLst/>
-          </a:prstGeom>
-          <a:noFill/>
-          <a:ln/>
-        </p:spPr>
-        <p:txBody>
-          <a:bodyPr wrap="square" lIns="0" tIns="0" rIns="0" bIns="0" rtlCol="0" anchor="t"/>
-          <a:lstStyle/>
-          <a:p>
-            <a:pPr indent="0" marL="0">
-              <a:buNone/>
-            </a:pPr>
-            <a:r>
-              <a:rPr lang="en-US" sz="1250" b="1" dirty="0">
-                <a:solidFill>
-                  <a:srgbClr val="001E3C"/>
-                </a:solidFill>
-                <a:latin typeface="Meiryo" pitchFamily="34" charset="0"/>
-                <a:ea typeface="Meiryo" pitchFamily="34" charset="-122"/>
-                <a:cs typeface="Meiryo" pitchFamily="34" charset="-120"/>
-              </a:rPr>
-              <a:t>リポジトリの URL を貼って Enter</a:t>
-            </a:r>
-            <a:endParaRPr lang="en-US" sz="1250" dirty="0"/>
-          </a:p>
-        </p:txBody>
-      </p:sp>
-      <p:sp>
-        <p:nvSpPr>
-          <p:cNvPr id="19" name="Text 17"/>
-          <p:cNvSpPr txBox="1"/>
-          <p:nvPr/>
-        </p:nvSpPr>
-        <p:spPr>
-          <a:xfrm>
-            <a:off x="896112" y="3566160"/>
-            <a:ext cx="3858768" cy="347472"/>
-          </a:xfrm>
-          <a:prstGeom prst="rect">
-            <a:avLst/>
-          </a:prstGeom>
-          <a:noFill/>
-          <a:ln/>
-        </p:spPr>
-        <p:txBody>
-          <a:bodyPr wrap="square" lIns="0" tIns="0" rIns="0" bIns="0" rtlCol="0" anchor="t"/>
-          <a:lstStyle/>
-          <a:p>
-            <a:pPr indent="0" marL="0">
-              <a:buNone/>
-            </a:pPr>
-            <a:r>
-              <a:rPr lang="en-US" sz="1050" dirty="0">
-                <a:solidFill>
-                  <a:srgbClr val="1B2B3A"/>
-                </a:solidFill>
-                <a:latin typeface="Meiryo" pitchFamily="34" charset="0"/>
-                <a:ea typeface="Meiryo" pitchFamily="34" charset="-122"/>
-                <a:cs typeface="Meiryo" pitchFamily="34" charset="-120"/>
-              </a:rPr>
-              <a:t>警告が出たら funITclub の URL か確かめて進む</a:t>
-            </a:r>
-            <a:endParaRPr lang="en-US" sz="1050" dirty="0"/>
-          </a:p>
-        </p:txBody>
-      </p:sp>
-      <p:sp>
-        <p:nvSpPr>
-          <p:cNvPr id="20" name="Shape 18"/>
-          <p:cNvSpPr/>
-          <p:nvPr/>
-        </p:nvSpPr>
-        <p:spPr>
-          <a:xfrm>
-            <a:off x="457200" y="3931920"/>
-            <a:ext cx="310896" cy="310896"/>
-          </a:xfrm>
-          <a:prstGeom prst="ellipse">
-            <a:avLst/>
-          </a:prstGeom>
-          <a:solidFill>
-            <a:srgbClr val="001E3C"/>
-          </a:solidFill>
-          <a:ln w="12700">
-            <a:solidFill>
-              <a:srgbClr val="001E3C"/>
-            </a:solidFill>
-            <a:prstDash val="solid"/>
-          </a:ln>
-        </p:spPr>
-      </p:sp>
-      <p:sp>
-        <p:nvSpPr>
-          <p:cNvPr id="21" name="Text 19"/>
-          <p:cNvSpPr txBox="1"/>
-          <p:nvPr/>
-        </p:nvSpPr>
-        <p:spPr>
-          <a:xfrm>
-            <a:off x="457200" y="3931920"/>
-            <a:ext cx="310896" cy="310896"/>
-          </a:xfrm>
-          <a:prstGeom prst="rect">
-            <a:avLst/>
-          </a:prstGeom>
-          <a:noFill/>
-          <a:ln/>
-        </p:spPr>
-        <p:txBody>
-          <a:bodyPr wrap="square" lIns="0" tIns="0" rIns="0" bIns="0" rtlCol="0" anchor="ctr"/>
-          <a:lstStyle/>
-          <a:p>
-            <a:pPr algn="ctr" indent="0" marL="0">
-              <a:buNone/>
-            </a:pPr>
-            <a:r>
-              <a:rPr lang="en-US" sz="1100" b="1" dirty="0">
-                <a:solidFill>
-                  <a:srgbClr val="FFFFFF"/>
-                </a:solidFill>
-                <a:latin typeface="Consolas" pitchFamily="34" charset="0"/>
-                <a:ea typeface="Consolas" pitchFamily="34" charset="-122"/>
-                <a:cs typeface="Consolas" pitchFamily="34" charset="-120"/>
-              </a:rPr>
-              <a:t>5</a:t>
-            </a:r>
-            <a:endParaRPr lang="en-US" sz="1100" dirty="0"/>
-          </a:p>
-        </p:txBody>
-      </p:sp>
-      <p:sp>
-        <p:nvSpPr>
-          <p:cNvPr id="22" name="Text 20"/>
-          <p:cNvSpPr txBox="1"/>
-          <p:nvPr/>
-        </p:nvSpPr>
-        <p:spPr>
-          <a:xfrm>
-            <a:off x="896112" y="3941064"/>
-            <a:ext cx="3858768" cy="274320"/>
-          </a:xfrm>
-          <a:prstGeom prst="rect">
-            <a:avLst/>
-          </a:prstGeom>
-          <a:noFill/>
-          <a:ln/>
-        </p:spPr>
-        <p:txBody>
-          <a:bodyPr wrap="square" lIns="0" tIns="0" rIns="0" bIns="0" rtlCol="0" anchor="t"/>
-          <a:lstStyle/>
-          <a:p>
-            <a:pPr indent="0" marL="0">
-              <a:buNone/>
-            </a:pPr>
-            <a:r>
-              <a:rPr lang="en-US" sz="1250" b="1" dirty="0">
-                <a:solidFill>
-                  <a:srgbClr val="001E3C"/>
-                </a:solidFill>
-                <a:latin typeface="Meiryo" pitchFamily="34" charset="0"/>
-                <a:ea typeface="Meiryo" pitchFamily="34" charset="-122"/>
-                <a:cs typeface="Meiryo" pitchFamily="34" charset="-120"/>
-              </a:rPr>
-              <a:t>5〜10 分待つ</a:t>
-            </a:r>
-            <a:endParaRPr lang="en-US" sz="1250" dirty="0"/>
-          </a:p>
-        </p:txBody>
-      </p:sp>
-      <p:sp>
-        <p:nvSpPr>
-          <p:cNvPr id="23" name="Text 21"/>
-          <p:cNvSpPr txBox="1"/>
-          <p:nvPr/>
-        </p:nvSpPr>
-        <p:spPr>
-          <a:xfrm>
-            <a:off x="896112" y="4206240"/>
-            <a:ext cx="3858768" cy="347472"/>
-          </a:xfrm>
-          <a:prstGeom prst="rect">
-            <a:avLst/>
-          </a:prstGeom>
-          <a:noFill/>
-          <a:ln/>
-        </p:spPr>
-        <p:txBody>
-          <a:bodyPr wrap="square" lIns="0" tIns="0" rIns="0" bIns="0" rtlCol="0" anchor="t"/>
-          <a:lstStyle/>
-          <a:p>
-            <a:pPr indent="0" marL="0">
-              <a:buNone/>
-            </a:pPr>
-            <a:r>
-              <a:rPr lang="en-US" sz="1050" dirty="0">
-                <a:solidFill>
-                  <a:srgbClr val="1B2B3A"/>
-                </a:solidFill>
-                <a:latin typeface="Meiryo" pitchFamily="34" charset="0"/>
-                <a:ea typeface="Meiryo" pitchFamily="34" charset="-122"/>
-                <a:cs typeface="Meiryo" pitchFamily="34" charset="-120"/>
-              </a:rPr>
-              <a:t>「準備ができました。」と出たら完了</a:t>
-            </a:r>
-            <a:endParaRPr lang="en-US" sz="1050" dirty="0"/>
-          </a:p>
-        </p:txBody>
-      </p:sp>
-      <p:sp>
-        <p:nvSpPr>
-          <p:cNvPr id="24" name="Shape 22"/>
-          <p:cNvSpPr/>
-          <p:nvPr/>
-        </p:nvSpPr>
-        <p:spPr>
-          <a:xfrm>
-            <a:off x="4983480" y="1371600"/>
-            <a:ext cx="3703320" cy="3246120"/>
-          </a:xfrm>
-          <a:prstGeom prst="rect">
-            <a:avLst/>
-          </a:prstGeom>
-          <a:solidFill>
-            <a:srgbClr val="1F1F1F"/>
-          </a:solidFill>
-          <a:ln w="12700">
-            <a:solidFill>
-              <a:srgbClr val="3C3C3C"/>
+              <a:srgbClr val="FFFFFF"/>
             </a:solidFill>
             <a:prstDash val="solid"/>
           </a:ln>
@@ -3507,24 +2886,107 @@
       </p:sp>
       <p:sp>
         <p:nvSpPr>
-          <p:cNvPr id="25" name="Shape 23"/>
+          <p:cNvPr id="5" name="Text 3"/>
+          <p:cNvSpPr txBox="1"/>
+          <p:nvPr/>
+        </p:nvSpPr>
+        <p:spPr>
+          <a:xfrm>
+            <a:off x="640080" y="1417320"/>
+            <a:ext cx="4023360" cy="274320"/>
+          </a:xfrm>
+          <a:prstGeom prst="rect">
+            <a:avLst/>
+          </a:prstGeom>
+          <a:noFill/>
+          <a:ln/>
+        </p:spPr>
+        <p:txBody>
+          <a:bodyPr wrap="square" lIns="0" tIns="0" rIns="0" bIns="0" rtlCol="0" anchor="t"/>
+          <a:lstStyle/>
+          <a:p>
+            <a:pPr indent="0" marL="0">
+              <a:buNone/>
+            </a:pPr>
+            <a:r>
+              <a:rPr lang="en-US" sz="1200" b="1" dirty="0">
+                <a:solidFill>
+                  <a:srgbClr val="001E3C"/>
+                </a:solidFill>
+                <a:latin typeface="Meiryo" pitchFamily="34" charset="0"/>
+                <a:ea typeface="Meiryo" pitchFamily="34" charset="-122"/>
+                <a:cs typeface="Meiryo" pitchFamily="34" charset="-120"/>
+              </a:rPr>
+              <a:t>クローン（チェックアウト）とは</a:t>
+            </a:r>
+            <a:endParaRPr lang="en-US" sz="1200" dirty="0"/>
+          </a:p>
+        </p:txBody>
+      </p:sp>
+      <p:sp>
+        <p:nvSpPr>
+          <p:cNvPr id="6" name="Text 4"/>
+          <p:cNvSpPr txBox="1"/>
+          <p:nvPr/>
+        </p:nvSpPr>
+        <p:spPr>
+          <a:xfrm>
+            <a:off x="640080" y="1719072"/>
+            <a:ext cx="4023360" cy="457200"/>
+          </a:xfrm>
+          <a:prstGeom prst="rect">
+            <a:avLst/>
+          </a:prstGeom>
+          <a:noFill/>
+          <a:ln/>
+        </p:spPr>
+        <p:txBody>
+          <a:bodyPr wrap="square" lIns="0" tIns="0" rIns="0" bIns="0" rtlCol="0" anchor="t"/>
+          <a:lstStyle/>
+          <a:p>
+            <a:pPr indent="0" marL="0">
+              <a:lnSpc>
+                <a:spcPct val="115000"/>
+              </a:lnSpc>
+              <a:buNone/>
+            </a:pPr>
+            <a:r>
+              <a:rPr lang="en-US" sz="950" dirty="0">
+                <a:solidFill>
+                  <a:srgbClr val="1B2B3A"/>
+                </a:solidFill>
+                <a:latin typeface="Meiryo" pitchFamily="34" charset="0"/>
+                <a:ea typeface="Meiryo" pitchFamily="34" charset="-122"/>
+                <a:cs typeface="Meiryo" pitchFamily="34" charset="-120"/>
+              </a:rPr>
+              <a:t>GitHub にある WG のコード一式（リポジトリ）を、自分の作業部屋に写してくること。写したもので作業し、GitHub に送り返す（資料 03）。</a:t>
+            </a:r>
+            <a:endParaRPr lang="en-US" sz="950" dirty="0"/>
+          </a:p>
+        </p:txBody>
+      </p:sp>
+      <p:sp>
+        <p:nvSpPr>
+          <p:cNvPr id="7" name="Shape 5"/>
           <p:cNvSpPr/>
           <p:nvPr/>
         </p:nvSpPr>
         <p:spPr>
           <a:xfrm>
-            <a:off x="4983480" y="1371600"/>
-            <a:ext cx="3703320" cy="274320"/>
-          </a:xfrm>
-          <a:prstGeom prst="rect">
-            <a:avLst/>
+            <a:off x="640080" y="2212848"/>
+            <a:ext cx="841248" cy="219456"/>
+          </a:xfrm>
+          <a:prstGeom prst="roundRect">
+            <a:avLst>
+              <a:gd name="adj" fmla="val 50000"/>
+            </a:avLst>
           </a:prstGeom>
           <a:solidFill>
-            <a:srgbClr val="3C3C3C"/>
+            <a:srgbClr val="001E3C"/>
           </a:solidFill>
           <a:ln w="12700">
             <a:solidFill>
-              <a:srgbClr val="3C3C3C"/>
+              <a:srgbClr val="001E3C"/>
             </a:solidFill>
             <a:prstDash val="solid"/>
           </a:ln>
@@ -3532,13 +2994,908 @@
       </p:sp>
       <p:sp>
         <p:nvSpPr>
+          <p:cNvPr id="8" name="Text 6"/>
+          <p:cNvSpPr txBox="1"/>
+          <p:nvPr/>
+        </p:nvSpPr>
+        <p:spPr>
+          <a:xfrm>
+            <a:off x="640080" y="2212848"/>
+            <a:ext cx="841248" cy="219456"/>
+          </a:xfrm>
+          <a:prstGeom prst="rect">
+            <a:avLst/>
+          </a:prstGeom>
+          <a:noFill/>
+          <a:ln/>
+        </p:spPr>
+        <p:txBody>
+          <a:bodyPr wrap="square" lIns="0" tIns="0" rIns="0" bIns="0" rtlCol="0" anchor="ctr"/>
+          <a:lstStyle/>
+          <a:p>
+            <a:pPr algn="ctr" indent="0" marL="0">
+              <a:buNone/>
+            </a:pPr>
+            <a:r>
+              <a:rPr lang="en-US" sz="900" b="1" dirty="0">
+                <a:solidFill>
+                  <a:srgbClr val="FFFFFF"/>
+                </a:solidFill>
+                <a:latin typeface="Meiryo" pitchFamily="34" charset="0"/>
+                <a:ea typeface="Meiryo" pitchFamily="34" charset="-122"/>
+                <a:cs typeface="Meiryo" pitchFamily="34" charset="-120"/>
+              </a:rPr>
+              <a:t>GitHub</a:t>
+            </a:r>
+            <a:endParaRPr lang="en-US" sz="900" dirty="0"/>
+          </a:p>
+        </p:txBody>
+      </p:sp>
+      <p:sp>
+        <p:nvSpPr>
+          <p:cNvPr id="9" name="Shape 7"/>
+          <p:cNvSpPr/>
+          <p:nvPr/>
+        </p:nvSpPr>
+        <p:spPr>
+          <a:xfrm>
+            <a:off x="1499616" y="2322576"/>
+            <a:ext cx="146304" cy="0"/>
+          </a:xfrm>
+          <a:prstGeom prst="line">
+            <a:avLst/>
+          </a:prstGeom>
+          <a:noFill/>
+          <a:ln w="12700">
+            <a:solidFill>
+              <a:srgbClr val="1A4A70"/>
+            </a:solidFill>
+            <a:prstDash val="solid"/>
+            <a:tailEnd type="triangle"/>
+          </a:ln>
+        </p:spPr>
+      </p:sp>
+      <p:sp>
+        <p:nvSpPr>
+          <p:cNvPr id="10" name="Shape 8"/>
+          <p:cNvSpPr/>
+          <p:nvPr/>
+        </p:nvSpPr>
+        <p:spPr>
+          <a:xfrm>
+            <a:off x="1664208" y="2212848"/>
+            <a:ext cx="841248" cy="219456"/>
+          </a:xfrm>
+          <a:prstGeom prst="roundRect">
+            <a:avLst>
+              <a:gd name="adj" fmla="val 50000"/>
+            </a:avLst>
+          </a:prstGeom>
+          <a:solidFill>
+            <a:srgbClr val="E4F2FF"/>
+          </a:solidFill>
+          <a:ln w="12700">
+            <a:solidFill>
+              <a:srgbClr val="E4F2FF"/>
+            </a:solidFill>
+            <a:prstDash val="solid"/>
+          </a:ln>
+        </p:spPr>
+      </p:sp>
+      <p:sp>
+        <p:nvSpPr>
+          <p:cNvPr id="11" name="Text 9"/>
+          <p:cNvSpPr txBox="1"/>
+          <p:nvPr/>
+        </p:nvSpPr>
+        <p:spPr>
+          <a:xfrm>
+            <a:off x="1664208" y="2212848"/>
+            <a:ext cx="841248" cy="219456"/>
+          </a:xfrm>
+          <a:prstGeom prst="rect">
+            <a:avLst/>
+          </a:prstGeom>
+          <a:noFill/>
+          <a:ln/>
+        </p:spPr>
+        <p:txBody>
+          <a:bodyPr wrap="square" lIns="0" tIns="0" rIns="0" bIns="0" rtlCol="0" anchor="ctr"/>
+          <a:lstStyle/>
+          <a:p>
+            <a:pPr algn="ctr" indent="0" marL="0">
+              <a:buNone/>
+            </a:pPr>
+            <a:r>
+              <a:rPr lang="en-US" sz="900" b="1" dirty="0">
+                <a:solidFill>
+                  <a:srgbClr val="1A4A70"/>
+                </a:solidFill>
+                <a:latin typeface="Meiryo" pitchFamily="34" charset="0"/>
+                <a:ea typeface="Meiryo" pitchFamily="34" charset="-122"/>
+                <a:cs typeface="Meiryo" pitchFamily="34" charset="-120"/>
+              </a:rPr>
+              <a:t>クローン</a:t>
+            </a:r>
+            <a:endParaRPr lang="en-US" sz="900" dirty="0"/>
+          </a:p>
+        </p:txBody>
+      </p:sp>
+      <p:sp>
+        <p:nvSpPr>
+          <p:cNvPr id="12" name="Shape 10"/>
+          <p:cNvSpPr/>
+          <p:nvPr/>
+        </p:nvSpPr>
+        <p:spPr>
+          <a:xfrm>
+            <a:off x="2523744" y="2322576"/>
+            <a:ext cx="146304" cy="0"/>
+          </a:xfrm>
+          <a:prstGeom prst="line">
+            <a:avLst/>
+          </a:prstGeom>
+          <a:noFill/>
+          <a:ln w="12700">
+            <a:solidFill>
+              <a:srgbClr val="1A4A70"/>
+            </a:solidFill>
+            <a:prstDash val="solid"/>
+            <a:tailEnd type="triangle"/>
+          </a:ln>
+        </p:spPr>
+      </p:sp>
+      <p:sp>
+        <p:nvSpPr>
+          <p:cNvPr id="13" name="Shape 11"/>
+          <p:cNvSpPr/>
+          <p:nvPr/>
+        </p:nvSpPr>
+        <p:spPr>
+          <a:xfrm>
+            <a:off x="2688336" y="2212848"/>
+            <a:ext cx="841248" cy="219456"/>
+          </a:xfrm>
+          <a:prstGeom prst="roundRect">
+            <a:avLst>
+              <a:gd name="adj" fmla="val 50000"/>
+            </a:avLst>
+          </a:prstGeom>
+          <a:solidFill>
+            <a:srgbClr val="001E3C"/>
+          </a:solidFill>
+          <a:ln w="12700">
+            <a:solidFill>
+              <a:srgbClr val="001E3C"/>
+            </a:solidFill>
+            <a:prstDash val="solid"/>
+          </a:ln>
+        </p:spPr>
+      </p:sp>
+      <p:sp>
+        <p:nvSpPr>
+          <p:cNvPr id="14" name="Text 12"/>
+          <p:cNvSpPr txBox="1"/>
+          <p:nvPr/>
+        </p:nvSpPr>
+        <p:spPr>
+          <a:xfrm>
+            <a:off x="2688336" y="2212848"/>
+            <a:ext cx="841248" cy="219456"/>
+          </a:xfrm>
+          <a:prstGeom prst="rect">
+            <a:avLst/>
+          </a:prstGeom>
+          <a:noFill/>
+          <a:ln/>
+        </p:spPr>
+        <p:txBody>
+          <a:bodyPr wrap="square" lIns="0" tIns="0" rIns="0" bIns="0" rtlCol="0" anchor="ctr"/>
+          <a:lstStyle/>
+          <a:p>
+            <a:pPr algn="ctr" indent="0" marL="0">
+              <a:buNone/>
+            </a:pPr>
+            <a:r>
+              <a:rPr lang="en-US" sz="900" b="1" dirty="0">
+                <a:solidFill>
+                  <a:srgbClr val="FFFFFF"/>
+                </a:solidFill>
+                <a:latin typeface="Meiryo" pitchFamily="34" charset="0"/>
+                <a:ea typeface="Meiryo" pitchFamily="34" charset="-122"/>
+                <a:cs typeface="Meiryo" pitchFamily="34" charset="-120"/>
+              </a:rPr>
+              <a:t>作業部屋</a:t>
+            </a:r>
+            <a:endParaRPr lang="en-US" sz="900" dirty="0"/>
+          </a:p>
+        </p:txBody>
+      </p:sp>
+      <p:sp>
+        <p:nvSpPr>
+          <p:cNvPr id="15" name="Shape 13"/>
+          <p:cNvSpPr/>
+          <p:nvPr/>
+        </p:nvSpPr>
+        <p:spPr>
+          <a:xfrm>
+            <a:off x="3547872" y="2322576"/>
+            <a:ext cx="146304" cy="0"/>
+          </a:xfrm>
+          <a:prstGeom prst="line">
+            <a:avLst/>
+          </a:prstGeom>
+          <a:noFill/>
+          <a:ln w="12700">
+            <a:solidFill>
+              <a:srgbClr val="1A4A70"/>
+            </a:solidFill>
+            <a:prstDash val="solid"/>
+            <a:tailEnd type="triangle"/>
+          </a:ln>
+        </p:spPr>
+      </p:sp>
+      <p:sp>
+        <p:nvSpPr>
+          <p:cNvPr id="16" name="Shape 14"/>
+          <p:cNvSpPr/>
+          <p:nvPr/>
+        </p:nvSpPr>
+        <p:spPr>
+          <a:xfrm>
+            <a:off x="3712464" y="2212848"/>
+            <a:ext cx="841248" cy="219456"/>
+          </a:xfrm>
+          <a:prstGeom prst="roundRect">
+            <a:avLst>
+              <a:gd name="adj" fmla="val 50000"/>
+            </a:avLst>
+          </a:prstGeom>
+          <a:solidFill>
+            <a:srgbClr val="E4F2FF"/>
+          </a:solidFill>
+          <a:ln w="12700">
+            <a:solidFill>
+              <a:srgbClr val="E4F2FF"/>
+            </a:solidFill>
+            <a:prstDash val="solid"/>
+          </a:ln>
+        </p:spPr>
+      </p:sp>
+      <p:sp>
+        <p:nvSpPr>
+          <p:cNvPr id="17" name="Text 15"/>
+          <p:cNvSpPr txBox="1"/>
+          <p:nvPr/>
+        </p:nvSpPr>
+        <p:spPr>
+          <a:xfrm>
+            <a:off x="3712464" y="2212848"/>
+            <a:ext cx="841248" cy="219456"/>
+          </a:xfrm>
+          <a:prstGeom prst="rect">
+            <a:avLst/>
+          </a:prstGeom>
+          <a:noFill/>
+          <a:ln/>
+        </p:spPr>
+        <p:txBody>
+          <a:bodyPr wrap="square" lIns="0" tIns="0" rIns="0" bIns="0" rtlCol="0" anchor="ctr"/>
+          <a:lstStyle/>
+          <a:p>
+            <a:pPr algn="ctr" indent="0" marL="0">
+              <a:buNone/>
+            </a:pPr>
+            <a:r>
+              <a:rPr lang="en-US" sz="900" b="1" dirty="0">
+                <a:solidFill>
+                  <a:srgbClr val="1A4A70"/>
+                </a:solidFill>
+                <a:latin typeface="Meiryo" pitchFamily="34" charset="0"/>
+                <a:ea typeface="Meiryo" pitchFamily="34" charset="-122"/>
+                <a:cs typeface="Meiryo" pitchFamily="34" charset="-120"/>
+              </a:rPr>
+              <a:t>送り返す</a:t>
+            </a:r>
+            <a:endParaRPr lang="en-US" sz="900" dirty="0"/>
+          </a:p>
+        </p:txBody>
+      </p:sp>
+      <p:sp>
+        <p:nvSpPr>
+          <p:cNvPr id="18" name="Shape 16"/>
+          <p:cNvSpPr/>
+          <p:nvPr/>
+        </p:nvSpPr>
+        <p:spPr>
+          <a:xfrm>
+            <a:off x="457200" y="2697480"/>
+            <a:ext cx="310896" cy="310896"/>
+          </a:xfrm>
+          <a:prstGeom prst="ellipse">
+            <a:avLst/>
+          </a:prstGeom>
+          <a:solidFill>
+            <a:srgbClr val="001E3C"/>
+          </a:solidFill>
+          <a:ln w="12700">
+            <a:solidFill>
+              <a:srgbClr val="001E3C"/>
+            </a:solidFill>
+            <a:prstDash val="solid"/>
+          </a:ln>
+        </p:spPr>
+      </p:sp>
+      <p:sp>
+        <p:nvSpPr>
+          <p:cNvPr id="19" name="Text 17"/>
+          <p:cNvSpPr txBox="1"/>
+          <p:nvPr/>
+        </p:nvSpPr>
+        <p:spPr>
+          <a:xfrm>
+            <a:off x="457200" y="2697480"/>
+            <a:ext cx="310896" cy="310896"/>
+          </a:xfrm>
+          <a:prstGeom prst="rect">
+            <a:avLst/>
+          </a:prstGeom>
+          <a:noFill/>
+          <a:ln/>
+        </p:spPr>
+        <p:txBody>
+          <a:bodyPr wrap="square" lIns="0" tIns="0" rIns="0" bIns="0" rtlCol="0" anchor="ctr"/>
+          <a:lstStyle/>
+          <a:p>
+            <a:pPr algn="ctr" indent="0" marL="0">
+              <a:buNone/>
+            </a:pPr>
+            <a:r>
+              <a:rPr lang="en-US" sz="1100" b="1" dirty="0">
+                <a:solidFill>
+                  <a:srgbClr val="FFFFFF"/>
+                </a:solidFill>
+                <a:latin typeface="Consolas" pitchFamily="34" charset="0"/>
+                <a:ea typeface="Consolas" pitchFamily="34" charset="-122"/>
+                <a:cs typeface="Consolas" pitchFamily="34" charset="-120"/>
+              </a:rPr>
+              <a:t>1</a:t>
+            </a:r>
+            <a:endParaRPr lang="en-US" sz="1100" dirty="0"/>
+          </a:p>
+        </p:txBody>
+      </p:sp>
+      <p:sp>
+        <p:nvSpPr>
+          <p:cNvPr id="20" name="Text 18"/>
+          <p:cNvSpPr txBox="1"/>
+          <p:nvPr/>
+        </p:nvSpPr>
+        <p:spPr>
+          <a:xfrm>
+            <a:off x="896112" y="2706624"/>
+            <a:ext cx="3904488" cy="274320"/>
+          </a:xfrm>
+          <a:prstGeom prst="rect">
+            <a:avLst/>
+          </a:prstGeom>
+          <a:noFill/>
+          <a:ln/>
+        </p:spPr>
+        <p:txBody>
+          <a:bodyPr wrap="square" lIns="0" tIns="0" rIns="0" bIns="0" rtlCol="0" anchor="t"/>
+          <a:lstStyle/>
+          <a:p>
+            <a:pPr indent="0" marL="0">
+              <a:buNone/>
+            </a:pPr>
+            <a:r>
+              <a:rPr lang="en-US" sz="1250" b="1" dirty="0">
+                <a:solidFill>
+                  <a:srgbClr val="001E3C"/>
+                </a:solidFill>
+                <a:latin typeface="Meiryo" pitchFamily="34" charset="0"/>
+                <a:ea typeface="Meiryo" pitchFamily="34" charset="-122"/>
+                <a:cs typeface="Meiryo" pitchFamily="34" charset="-120"/>
+              </a:rPr>
+              <a:t>WG のリポジトリを開く</a:t>
+            </a:r>
+            <a:endParaRPr lang="en-US" sz="1250" dirty="0"/>
+          </a:p>
+        </p:txBody>
+      </p:sp>
+      <p:sp>
+        <p:nvSpPr>
+          <p:cNvPr id="21" name="Text 19"/>
+          <p:cNvSpPr txBox="1"/>
+          <p:nvPr/>
+        </p:nvSpPr>
+        <p:spPr>
+          <a:xfrm>
+            <a:off x="896112" y="2971800"/>
+            <a:ext cx="3904488" cy="182880"/>
+          </a:xfrm>
+          <a:prstGeom prst="rect">
+            <a:avLst/>
+          </a:prstGeom>
+          <a:noFill/>
+          <a:ln/>
+        </p:spPr>
+        <p:txBody>
+          <a:bodyPr wrap="square" lIns="0" tIns="0" rIns="0" bIns="0" rtlCol="0" anchor="t"/>
+          <a:lstStyle/>
+          <a:p>
+            <a:pPr indent="0" marL="0">
+              <a:buNone/>
+            </a:pPr>
+            <a:r>
+              <a:rPr lang="en-US" sz="950" dirty="0">
+                <a:solidFill>
+                  <a:srgbClr val="1B2B3A"/>
+                </a:solidFill>
+                <a:latin typeface="Meiryo" pitchFamily="34" charset="0"/>
+                <a:ea typeface="Meiryo" pitchFamily="34" charset="-122"/>
+                <a:cs typeface="Meiryo" pitchFamily="34" charset="-120"/>
+              </a:rPr>
+              <a:t>github.com/funITclub/wg-&lt;名前&gt;</a:t>
+            </a:r>
+            <a:endParaRPr lang="en-US" sz="950" dirty="0"/>
+          </a:p>
+        </p:txBody>
+      </p:sp>
+      <p:sp>
+        <p:nvSpPr>
+          <p:cNvPr id="22" name="Shape 20"/>
+          <p:cNvSpPr/>
+          <p:nvPr/>
+        </p:nvSpPr>
+        <p:spPr>
+          <a:xfrm>
+            <a:off x="457200" y="3172968"/>
+            <a:ext cx="310896" cy="310896"/>
+          </a:xfrm>
+          <a:prstGeom prst="ellipse">
+            <a:avLst/>
+          </a:prstGeom>
+          <a:solidFill>
+            <a:srgbClr val="001E3C"/>
+          </a:solidFill>
+          <a:ln w="12700">
+            <a:solidFill>
+              <a:srgbClr val="001E3C"/>
+            </a:solidFill>
+            <a:prstDash val="solid"/>
+          </a:ln>
+        </p:spPr>
+      </p:sp>
+      <p:sp>
+        <p:nvSpPr>
+          <p:cNvPr id="23" name="Text 21"/>
+          <p:cNvSpPr txBox="1"/>
+          <p:nvPr/>
+        </p:nvSpPr>
+        <p:spPr>
+          <a:xfrm>
+            <a:off x="457200" y="3172968"/>
+            <a:ext cx="310896" cy="310896"/>
+          </a:xfrm>
+          <a:prstGeom prst="rect">
+            <a:avLst/>
+          </a:prstGeom>
+          <a:noFill/>
+          <a:ln/>
+        </p:spPr>
+        <p:txBody>
+          <a:bodyPr wrap="square" lIns="0" tIns="0" rIns="0" bIns="0" rtlCol="0" anchor="ctr"/>
+          <a:lstStyle/>
+          <a:p>
+            <a:pPr algn="ctr" indent="0" marL="0">
+              <a:buNone/>
+            </a:pPr>
+            <a:r>
+              <a:rPr lang="en-US" sz="1100" b="1" dirty="0">
+                <a:solidFill>
+                  <a:srgbClr val="FFFFFF"/>
+                </a:solidFill>
+                <a:latin typeface="Consolas" pitchFamily="34" charset="0"/>
+                <a:ea typeface="Consolas" pitchFamily="34" charset="-122"/>
+                <a:cs typeface="Consolas" pitchFamily="34" charset="-120"/>
+              </a:rPr>
+              <a:t>2</a:t>
+            </a:r>
+            <a:endParaRPr lang="en-US" sz="1100" dirty="0"/>
+          </a:p>
+        </p:txBody>
+      </p:sp>
+      <p:sp>
+        <p:nvSpPr>
+          <p:cNvPr id="24" name="Text 22"/>
+          <p:cNvSpPr txBox="1"/>
+          <p:nvPr/>
+        </p:nvSpPr>
+        <p:spPr>
+          <a:xfrm>
+            <a:off x="896112" y="3182112"/>
+            <a:ext cx="3904488" cy="274320"/>
+          </a:xfrm>
+          <a:prstGeom prst="rect">
+            <a:avLst/>
+          </a:prstGeom>
+          <a:noFill/>
+          <a:ln/>
+        </p:spPr>
+        <p:txBody>
+          <a:bodyPr wrap="square" lIns="0" tIns="0" rIns="0" bIns="0" rtlCol="0" anchor="t"/>
+          <a:lstStyle/>
+          <a:p>
+            <a:pPr indent="0" marL="0">
+              <a:buNone/>
+            </a:pPr>
+            <a:r>
+              <a:rPr lang="en-US" sz="1250" b="1" dirty="0">
+                <a:solidFill>
+                  <a:srgbClr val="001E3C"/>
+                </a:solidFill>
+                <a:latin typeface="Meiryo" pitchFamily="34" charset="0"/>
+                <a:ea typeface="Meiryo" pitchFamily="34" charset="-122"/>
+                <a:cs typeface="Meiryo" pitchFamily="34" charset="-120"/>
+              </a:rPr>
+              <a:t>緑の「Code」を押す</a:t>
+            </a:r>
+            <a:endParaRPr lang="en-US" sz="1250" dirty="0"/>
+          </a:p>
+        </p:txBody>
+      </p:sp>
+      <p:sp>
+        <p:nvSpPr>
+          <p:cNvPr id="25" name="Text 23"/>
+          <p:cNvSpPr txBox="1"/>
+          <p:nvPr/>
+        </p:nvSpPr>
+        <p:spPr>
+          <a:xfrm>
+            <a:off x="896112" y="3447288"/>
+            <a:ext cx="3904488" cy="182880"/>
+          </a:xfrm>
+          <a:prstGeom prst="rect">
+            <a:avLst/>
+          </a:prstGeom>
+          <a:noFill/>
+          <a:ln/>
+        </p:spPr>
+        <p:txBody>
+          <a:bodyPr wrap="square" lIns="0" tIns="0" rIns="0" bIns="0" rtlCol="0" anchor="t"/>
+          <a:lstStyle/>
+          <a:p>
+            <a:pPr indent="0" marL="0">
+              <a:buNone/>
+            </a:pPr>
+            <a:r>
+              <a:rPr lang="en-US" sz="950" dirty="0">
+                <a:solidFill>
+                  <a:srgbClr val="1B2B3A"/>
+                </a:solidFill>
+                <a:latin typeface="Meiryo" pitchFamily="34" charset="0"/>
+                <a:ea typeface="Meiryo" pitchFamily="34" charset="-122"/>
+                <a:cs typeface="Meiryo" pitchFamily="34" charset="-120"/>
+              </a:rPr>
+              <a:t>リポジトリの画面の右上</a:t>
+            </a:r>
+            <a:endParaRPr lang="en-US" sz="950" dirty="0"/>
+          </a:p>
+        </p:txBody>
+      </p:sp>
+      <p:sp>
+        <p:nvSpPr>
           <p:cNvPr id="26" name="Shape 24"/>
           <p:cNvSpPr/>
           <p:nvPr/>
         </p:nvSpPr>
         <p:spPr>
           <a:xfrm>
-            <a:off x="5111496" y="1463040"/>
+            <a:off x="457200" y="3648456"/>
+            <a:ext cx="310896" cy="310896"/>
+          </a:xfrm>
+          <a:prstGeom prst="ellipse">
+            <a:avLst/>
+          </a:prstGeom>
+          <a:solidFill>
+            <a:srgbClr val="001E3C"/>
+          </a:solidFill>
+          <a:ln w="12700">
+            <a:solidFill>
+              <a:srgbClr val="001E3C"/>
+            </a:solidFill>
+            <a:prstDash val="solid"/>
+          </a:ln>
+        </p:spPr>
+      </p:sp>
+      <p:sp>
+        <p:nvSpPr>
+          <p:cNvPr id="27" name="Text 25"/>
+          <p:cNvSpPr txBox="1"/>
+          <p:nvPr/>
+        </p:nvSpPr>
+        <p:spPr>
+          <a:xfrm>
+            <a:off x="457200" y="3648456"/>
+            <a:ext cx="310896" cy="310896"/>
+          </a:xfrm>
+          <a:prstGeom prst="rect">
+            <a:avLst/>
+          </a:prstGeom>
+          <a:noFill/>
+          <a:ln/>
+        </p:spPr>
+        <p:txBody>
+          <a:bodyPr wrap="square" lIns="0" tIns="0" rIns="0" bIns="0" rtlCol="0" anchor="ctr"/>
+          <a:lstStyle/>
+          <a:p>
+            <a:pPr algn="ctr" indent="0" marL="0">
+              <a:buNone/>
+            </a:pPr>
+            <a:r>
+              <a:rPr lang="en-US" sz="1100" b="1" dirty="0">
+                <a:solidFill>
+                  <a:srgbClr val="FFFFFF"/>
+                </a:solidFill>
+                <a:latin typeface="Consolas" pitchFamily="34" charset="0"/>
+                <a:ea typeface="Consolas" pitchFamily="34" charset="-122"/>
+                <a:cs typeface="Consolas" pitchFamily="34" charset="-120"/>
+              </a:rPr>
+              <a:t>3</a:t>
+            </a:r>
+            <a:endParaRPr lang="en-US" sz="1100" dirty="0"/>
+          </a:p>
+        </p:txBody>
+      </p:sp>
+      <p:sp>
+        <p:nvSpPr>
+          <p:cNvPr id="28" name="Text 26"/>
+          <p:cNvSpPr txBox="1"/>
+          <p:nvPr/>
+        </p:nvSpPr>
+        <p:spPr>
+          <a:xfrm>
+            <a:off x="896112" y="3657600"/>
+            <a:ext cx="3904488" cy="274320"/>
+          </a:xfrm>
+          <a:prstGeom prst="rect">
+            <a:avLst/>
+          </a:prstGeom>
+          <a:noFill/>
+          <a:ln/>
+        </p:spPr>
+        <p:txBody>
+          <a:bodyPr wrap="square" lIns="0" tIns="0" rIns="0" bIns="0" rtlCol="0" anchor="t"/>
+          <a:lstStyle/>
+          <a:p>
+            <a:pPr indent="0" marL="0">
+              <a:buNone/>
+            </a:pPr>
+            <a:r>
+              <a:rPr lang="en-US" sz="1250" b="1" dirty="0">
+                <a:solidFill>
+                  <a:srgbClr val="001E3C"/>
+                </a:solidFill>
+                <a:latin typeface="Meiryo" pitchFamily="34" charset="0"/>
+                <a:ea typeface="Meiryo" pitchFamily="34" charset="-122"/>
+                <a:cs typeface="Meiryo" pitchFamily="34" charset="-120"/>
+              </a:rPr>
+              <a:t>「Local」→「HTTPS」を選ぶ</a:t>
+            </a:r>
+            <a:endParaRPr lang="en-US" sz="1250" dirty="0"/>
+          </a:p>
+        </p:txBody>
+      </p:sp>
+      <p:sp>
+        <p:nvSpPr>
+          <p:cNvPr id="29" name="Shape 27"/>
+          <p:cNvSpPr/>
+          <p:nvPr/>
+        </p:nvSpPr>
+        <p:spPr>
+          <a:xfrm>
+            <a:off x="457200" y="4123944"/>
+            <a:ext cx="310896" cy="310896"/>
+          </a:xfrm>
+          <a:prstGeom prst="ellipse">
+            <a:avLst/>
+          </a:prstGeom>
+          <a:solidFill>
+            <a:srgbClr val="001E3C"/>
+          </a:solidFill>
+          <a:ln w="12700">
+            <a:solidFill>
+              <a:srgbClr val="001E3C"/>
+            </a:solidFill>
+            <a:prstDash val="solid"/>
+          </a:ln>
+        </p:spPr>
+      </p:sp>
+      <p:sp>
+        <p:nvSpPr>
+          <p:cNvPr id="30" name="Text 28"/>
+          <p:cNvSpPr txBox="1"/>
+          <p:nvPr/>
+        </p:nvSpPr>
+        <p:spPr>
+          <a:xfrm>
+            <a:off x="457200" y="4123944"/>
+            <a:ext cx="310896" cy="310896"/>
+          </a:xfrm>
+          <a:prstGeom prst="rect">
+            <a:avLst/>
+          </a:prstGeom>
+          <a:noFill/>
+          <a:ln/>
+        </p:spPr>
+        <p:txBody>
+          <a:bodyPr wrap="square" lIns="0" tIns="0" rIns="0" bIns="0" rtlCol="0" anchor="ctr"/>
+          <a:lstStyle/>
+          <a:p>
+            <a:pPr algn="ctr" indent="0" marL="0">
+              <a:buNone/>
+            </a:pPr>
+            <a:r>
+              <a:rPr lang="en-US" sz="1100" b="1" dirty="0">
+                <a:solidFill>
+                  <a:srgbClr val="FFFFFF"/>
+                </a:solidFill>
+                <a:latin typeface="Consolas" pitchFamily="34" charset="0"/>
+                <a:ea typeface="Consolas" pitchFamily="34" charset="-122"/>
+                <a:cs typeface="Consolas" pitchFamily="34" charset="-120"/>
+              </a:rPr>
+              <a:t>4</a:t>
+            </a:r>
+            <a:endParaRPr lang="en-US" sz="1100" dirty="0"/>
+          </a:p>
+        </p:txBody>
+      </p:sp>
+      <p:sp>
+        <p:nvSpPr>
+          <p:cNvPr id="31" name="Text 29"/>
+          <p:cNvSpPr txBox="1"/>
+          <p:nvPr/>
+        </p:nvSpPr>
+        <p:spPr>
+          <a:xfrm>
+            <a:off x="896112" y="4133088"/>
+            <a:ext cx="3904488" cy="274320"/>
+          </a:xfrm>
+          <a:prstGeom prst="rect">
+            <a:avLst/>
+          </a:prstGeom>
+          <a:noFill/>
+          <a:ln/>
+        </p:spPr>
+        <p:txBody>
+          <a:bodyPr wrap="square" lIns="0" tIns="0" rIns="0" bIns="0" rtlCol="0" anchor="t"/>
+          <a:lstStyle/>
+          <a:p>
+            <a:pPr indent="0" marL="0">
+              <a:buNone/>
+            </a:pPr>
+            <a:r>
+              <a:rPr lang="en-US" sz="1250" b="1" dirty="0">
+                <a:solidFill>
+                  <a:srgbClr val="001E3C"/>
+                </a:solidFill>
+                <a:latin typeface="Meiryo" pitchFamily="34" charset="0"/>
+                <a:ea typeface="Meiryo" pitchFamily="34" charset="-122"/>
+                <a:cs typeface="Meiryo" pitchFamily="34" charset="-120"/>
+              </a:rPr>
+              <a:t>URL をコピーする</a:t>
+            </a:r>
+            <a:endParaRPr lang="en-US" sz="1250" dirty="0"/>
+          </a:p>
+        </p:txBody>
+      </p:sp>
+      <p:sp>
+        <p:nvSpPr>
+          <p:cNvPr id="32" name="Text 30"/>
+          <p:cNvSpPr txBox="1"/>
+          <p:nvPr/>
+        </p:nvSpPr>
+        <p:spPr>
+          <a:xfrm>
+            <a:off x="896112" y="4398264"/>
+            <a:ext cx="3904488" cy="182880"/>
+          </a:xfrm>
+          <a:prstGeom prst="rect">
+            <a:avLst/>
+          </a:prstGeom>
+          <a:noFill/>
+          <a:ln/>
+        </p:spPr>
+        <p:txBody>
+          <a:bodyPr wrap="square" lIns="0" tIns="0" rIns="0" bIns="0" rtlCol="0" anchor="t"/>
+          <a:lstStyle/>
+          <a:p>
+            <a:pPr indent="0" marL="0">
+              <a:buNone/>
+            </a:pPr>
+            <a:r>
+              <a:rPr lang="en-US" sz="950" dirty="0">
+                <a:solidFill>
+                  <a:srgbClr val="1B2B3A"/>
+                </a:solidFill>
+                <a:latin typeface="Meiryo" pitchFamily="34" charset="0"/>
+                <a:ea typeface="Meiryo" pitchFamily="34" charset="-122"/>
+                <a:cs typeface="Meiryo" pitchFamily="34" charset="-120"/>
+              </a:rPr>
+              <a:t>URL の右のコピーのボタン（右の画面）</a:t>
+            </a:r>
+            <a:endParaRPr lang="en-US" sz="950" dirty="0"/>
+          </a:p>
+        </p:txBody>
+      </p:sp>
+      <p:sp>
+        <p:nvSpPr>
+          <p:cNvPr id="33" name="Shape 31"/>
+          <p:cNvSpPr/>
+          <p:nvPr/>
+        </p:nvSpPr>
+        <p:spPr>
+          <a:xfrm>
+            <a:off x="4983480" y="1325880"/>
+            <a:ext cx="3703320" cy="3291840"/>
+          </a:xfrm>
+          <a:prstGeom prst="rect">
+            <a:avLst/>
+          </a:prstGeom>
+          <a:solidFill>
+            <a:srgbClr val="FFFFFF"/>
+          </a:solidFill>
+          <a:ln w="12700">
+            <a:solidFill>
+              <a:srgbClr val="DDDDDD"/>
+            </a:solidFill>
+            <a:prstDash val="solid"/>
+          </a:ln>
+          <a:effectLst>
+            <a:outerShdw sx="100000" sy="100000" kx="0" ky="0" algn="bl" rotWithShape="0" blurRad="76200" dist="25400" dir="5400000">
+              <a:srgbClr val="000000">
+                <a:alpha val="12000"/>
+              </a:srgbClr>
+            </a:outerShdw>
+          </a:effectLst>
+        </p:spPr>
+      </p:sp>
+      <p:sp>
+        <p:nvSpPr>
+          <p:cNvPr id="34" name="Shape 32"/>
+          <p:cNvSpPr/>
+          <p:nvPr/>
+        </p:nvSpPr>
+        <p:spPr>
+          <a:xfrm>
+            <a:off x="4983480" y="1325880"/>
+            <a:ext cx="3703320" cy="274320"/>
+          </a:xfrm>
+          <a:prstGeom prst="rect">
+            <a:avLst/>
+          </a:prstGeom>
+          <a:solidFill>
+            <a:srgbClr val="E3E7EB"/>
+          </a:solidFill>
+          <a:ln w="12700">
+            <a:solidFill>
+              <a:srgbClr val="E3E7EB"/>
+            </a:solidFill>
+            <a:prstDash val="solid"/>
+          </a:ln>
+        </p:spPr>
+      </p:sp>
+      <p:sp>
+        <p:nvSpPr>
+          <p:cNvPr id="35" name="Shape 33"/>
+          <p:cNvSpPr/>
+          <p:nvPr/>
+        </p:nvSpPr>
+        <p:spPr>
+          <a:xfrm>
+            <a:off x="5111496" y="1417320"/>
             <a:ext cx="91440" cy="91440"/>
           </a:xfrm>
           <a:prstGeom prst="ellipse">
@@ -3557,13 +3914,13 @@
       </p:sp>
       <p:sp>
         <p:nvSpPr>
-          <p:cNvPr id="27" name="Shape 25"/>
+          <p:cNvPr id="36" name="Shape 34"/>
           <p:cNvSpPr/>
           <p:nvPr/>
         </p:nvSpPr>
         <p:spPr>
           <a:xfrm>
-            <a:off x="5276088" y="1463040"/>
+            <a:off x="5276088" y="1417320"/>
             <a:ext cx="91440" cy="91440"/>
           </a:xfrm>
           <a:prstGeom prst="ellipse">
@@ -3582,13 +3939,13 @@
       </p:sp>
       <p:sp>
         <p:nvSpPr>
-          <p:cNvPr id="28" name="Shape 26"/>
+          <p:cNvPr id="37" name="Shape 35"/>
           <p:cNvSpPr/>
           <p:nvPr/>
         </p:nvSpPr>
         <p:spPr>
           <a:xfrm>
-            <a:off x="5440680" y="1463040"/>
+            <a:off x="5440680" y="1417320"/>
             <a:ext cx="91440" cy="91440"/>
           </a:xfrm>
           <a:prstGeom prst="ellipse">
@@ -3607,13 +3964,13 @@
       </p:sp>
       <p:sp>
         <p:nvSpPr>
-          <p:cNvPr id="29" name="Text 27"/>
-          <p:cNvSpPr txBox="1"/>
-          <p:nvPr/>
-        </p:nvSpPr>
-        <p:spPr>
-          <a:xfrm>
-            <a:off x="5669280" y="1371600"/>
+          <p:cNvPr id="38" name="Text 36"/>
+          <p:cNvSpPr txBox="1"/>
+          <p:nvPr/>
+        </p:nvSpPr>
+        <p:spPr>
+          <a:xfrm>
+            <a:off x="5669280" y="1325880"/>
             <a:ext cx="2880360" cy="274320"/>
           </a:xfrm>
           <a:prstGeom prst="rect">
@@ -3632,38 +3989,115 @@
             <a:r>
               <a:rPr lang="en-US" sz="900" dirty="0">
                 <a:solidFill>
-                  <a:srgbClr val="CCCCCC"/>
+                  <a:srgbClr val="5A6B7B"/>
                 </a:solidFill>
                 <a:latin typeface="Meiryo" pitchFamily="34" charset="0"/>
                 <a:ea typeface="Meiryo" pitchFamily="34" charset="-122"/>
                 <a:cs typeface="Meiryo" pitchFamily="34" charset="-120"/>
               </a:rPr>
-              <a:t>コマンド パレット</a:t>
+              <a:t>github.com/funITclub/wg-protein</a:t>
             </a:r>
             <a:endParaRPr lang="en-US" sz="900" dirty="0"/>
           </a:p>
         </p:txBody>
       </p:sp>
-      <p:sp>
-        <p:nvSpPr>
-          <p:cNvPr id="30" name="Shape 28"/>
+      <p:pic>
+        <p:nvPicPr>
+          <p:cNvPr id="39" name="Image 0" descr="preencoded.png">    </p:cNvPr>
+          <p:cNvPicPr>
+            <a:picLocks noChangeAspect="1"/>
+          </p:cNvPicPr>
+          <p:nvPr/>
+        </p:nvPicPr>
+        <p:blipFill>
+          <a:blip r:embed="rId1"/>
+          <a:stretch>
+            <a:fillRect/>
+          </a:stretch>
+        </p:blipFill>
+        <p:spPr>
+          <a:xfrm>
+            <a:off x="5184648" y="1783080"/>
+            <a:ext cx="182880" cy="182880"/>
+          </a:xfrm>
+          <a:prstGeom prst="rect">
+            <a:avLst/>
+          </a:prstGeom>
+        </p:spPr>
+      </p:pic>
+      <p:sp>
+        <p:nvSpPr>
+          <p:cNvPr id="40" name="Text 37"/>
+          <p:cNvSpPr txBox="1"/>
+          <p:nvPr/>
+        </p:nvSpPr>
+        <p:spPr>
+          <a:xfrm>
+            <a:off x="5440680" y="1737360"/>
+            <a:ext cx="2011680" cy="274320"/>
+          </a:xfrm>
+          <a:prstGeom prst="rect">
+            <a:avLst/>
+          </a:prstGeom>
+          <a:noFill/>
+          <a:ln/>
+        </p:spPr>
+        <p:txBody>
+          <a:bodyPr wrap="square" lIns="0" tIns="0" rIns="0" bIns="0" rtlCol="0" anchor="ctr"/>
+          <a:lstStyle/>
+          <a:p>
+            <a:pPr indent="0" marL="0">
+              <a:buNone/>
+            </a:pPr>
+            <a:r>
+              <a:rPr lang="en-US" sz="1050" dirty="0">
+                <a:solidFill>
+                  <a:srgbClr val="0078D4"/>
+                </a:solidFill>
+                <a:latin typeface="Arial" pitchFamily="34" charset="0"/>
+                <a:ea typeface="Arial" pitchFamily="34" charset="-122"/>
+                <a:cs typeface="Arial" pitchFamily="34" charset="-120"/>
+              </a:rPr>
+              <a:t>funITclub / </a:t>
+            </a:r>
+            <a:pPr indent="0" marL="0">
+              <a:buNone/>
+            </a:pPr>
+            <a:r>
+              <a:rPr lang="en-US" sz="1050" b="1" dirty="0">
+                <a:solidFill>
+                  <a:srgbClr val="0078D4"/>
+                </a:solidFill>
+                <a:latin typeface="Arial" pitchFamily="34" charset="0"/>
+                <a:ea typeface="Arial" pitchFamily="34" charset="-122"/>
+                <a:cs typeface="Arial" pitchFamily="34" charset="-120"/>
+              </a:rPr>
+              <a:t>wg-protein</a:t>
+            </a:r>
+            <a:endParaRPr lang="en-US" sz="1050" dirty="0"/>
+          </a:p>
+        </p:txBody>
+      </p:sp>
+      <p:sp>
+        <p:nvSpPr>
+          <p:cNvPr id="41" name="Shape 38"/>
           <p:cNvSpPr/>
           <p:nvPr/>
         </p:nvSpPr>
         <p:spPr>
           <a:xfrm>
-            <a:off x="5166360" y="1783080"/>
-            <a:ext cx="3337560" cy="310896"/>
+            <a:off x="7772400" y="1755648"/>
+            <a:ext cx="713232" cy="256032"/>
           </a:xfrm>
           <a:prstGeom prst="rect">
             <a:avLst/>
           </a:prstGeom>
           <a:solidFill>
-            <a:srgbClr val="3C3C3C"/>
+            <a:srgbClr val="1F883D"/>
           </a:solidFill>
           <a:ln w="12700">
             <a:solidFill>
-              <a:srgbClr val="0078D4"/>
+              <a:srgbClr val="1F883D"/>
             </a:solidFill>
             <a:prstDash val="solid"/>
           </a:ln>
@@ -3671,14 +4105,14 @@
       </p:sp>
       <p:sp>
         <p:nvSpPr>
-          <p:cNvPr id="31" name="Text 29"/>
-          <p:cNvSpPr txBox="1"/>
-          <p:nvPr/>
-        </p:nvSpPr>
-        <p:spPr>
-          <a:xfrm>
-            <a:off x="5257800" y="1783080"/>
-            <a:ext cx="3246120" cy="310896"/>
+          <p:cNvPr id="42" name="Text 39"/>
+          <p:cNvSpPr txBox="1"/>
+          <p:nvPr/>
+        </p:nvSpPr>
+        <p:spPr>
+          <a:xfrm>
+            <a:off x="7772400" y="1755648"/>
+            <a:ext cx="713232" cy="256032"/>
           </a:xfrm>
           <a:prstGeom prst="rect">
             <a:avLst/>
@@ -3690,59 +4124,482 @@
           <a:bodyPr wrap="square" lIns="0" tIns="0" rIns="0" bIns="0" rtlCol="0" anchor="ctr"/>
           <a:lstStyle/>
           <a:p>
-            <a:pPr indent="0" marL="0">
+            <a:pPr algn="ctr" indent="0" marL="0">
+              <a:buNone/>
+            </a:pPr>
+            <a:r>
+              <a:rPr lang="en-US" sz="850" b="1" dirty="0">
+                <a:solidFill>
+                  <a:srgbClr val="FFFFFF"/>
+                </a:solidFill>
+                <a:latin typeface="Arial" pitchFamily="34" charset="0"/>
+                <a:ea typeface="Arial" pitchFamily="34" charset="-122"/>
+                <a:cs typeface="Arial" pitchFamily="34" charset="-120"/>
+              </a:rPr>
+              <a:t>&lt;&gt; Code  ▾</a:t>
+            </a:r>
+            <a:endParaRPr lang="en-US" sz="850" dirty="0"/>
+          </a:p>
+        </p:txBody>
+      </p:sp>
+      <p:sp>
+        <p:nvSpPr>
+          <p:cNvPr id="43" name="Shape 40"/>
+          <p:cNvSpPr/>
+          <p:nvPr/>
+        </p:nvSpPr>
+        <p:spPr>
+          <a:xfrm>
+            <a:off x="5486400" y="2148840"/>
+            <a:ext cx="3017520" cy="2148840"/>
+          </a:xfrm>
+          <a:prstGeom prst="rect">
+            <a:avLst/>
+          </a:prstGeom>
+          <a:solidFill>
+            <a:srgbClr val="FFFFFF"/>
+          </a:solidFill>
+          <a:ln w="12700">
+            <a:solidFill>
+              <a:srgbClr val="D0D7DE"/>
+            </a:solidFill>
+            <a:prstDash val="solid"/>
+          </a:ln>
+          <a:effectLst>
+            <a:outerShdw sx="100000" sy="100000" kx="0" ky="0" algn="bl" rotWithShape="0" blurRad="76200" dist="25400" dir="5400000">
+              <a:srgbClr val="000000">
+                <a:alpha val="12000"/>
+              </a:srgbClr>
+            </a:outerShdw>
+          </a:effectLst>
+        </p:spPr>
+      </p:sp>
+      <p:sp>
+        <p:nvSpPr>
+          <p:cNvPr id="44" name="Text 41"/>
+          <p:cNvSpPr txBox="1"/>
+          <p:nvPr/>
+        </p:nvSpPr>
+        <p:spPr>
+          <a:xfrm>
+            <a:off x="5623560" y="2221992"/>
+            <a:ext cx="731520" cy="237744"/>
+          </a:xfrm>
+          <a:prstGeom prst="rect">
+            <a:avLst/>
+          </a:prstGeom>
+          <a:noFill/>
+          <a:ln/>
+        </p:spPr>
+        <p:txBody>
+          <a:bodyPr wrap="square" lIns="0" tIns="0" rIns="0" bIns="0" rtlCol="0" anchor="t"/>
+          <a:lstStyle/>
+          <a:p>
+            <a:pPr algn="ctr" indent="0" marL="0">
+              <a:buNone/>
+            </a:pPr>
+            <a:r>
+              <a:rPr lang="en-US" sz="900" b="1" dirty="0">
+                <a:solidFill>
+                  <a:srgbClr val="1F2328"/>
+                </a:solidFill>
+                <a:latin typeface="Arial" pitchFamily="34" charset="0"/>
+                <a:ea typeface="Arial" pitchFamily="34" charset="-122"/>
+                <a:cs typeface="Arial" pitchFamily="34" charset="-120"/>
+              </a:rPr>
+              <a:t>Local</a:t>
+            </a:r>
+            <a:endParaRPr lang="en-US" sz="900" dirty="0"/>
+          </a:p>
+        </p:txBody>
+      </p:sp>
+      <p:sp>
+        <p:nvSpPr>
+          <p:cNvPr id="45" name="Shape 42"/>
+          <p:cNvSpPr/>
+          <p:nvPr/>
+        </p:nvSpPr>
+        <p:spPr>
+          <a:xfrm>
+            <a:off x="5669280" y="2478024"/>
+            <a:ext cx="640080" cy="0"/>
+          </a:xfrm>
+          <a:prstGeom prst="line">
+            <a:avLst/>
+          </a:prstGeom>
+          <a:noFill/>
+          <a:ln w="25400">
+            <a:solidFill>
+              <a:srgbClr val="FD8C73"/>
+            </a:solidFill>
+            <a:prstDash val="solid"/>
+          </a:ln>
+        </p:spPr>
+      </p:sp>
+      <p:sp>
+        <p:nvSpPr>
+          <p:cNvPr id="46" name="Text 43"/>
+          <p:cNvSpPr txBox="1"/>
+          <p:nvPr/>
+        </p:nvSpPr>
+        <p:spPr>
+          <a:xfrm>
+            <a:off x="6400800" y="2221992"/>
+            <a:ext cx="914400" cy="237744"/>
+          </a:xfrm>
+          <a:prstGeom prst="rect">
+            <a:avLst/>
+          </a:prstGeom>
+          <a:noFill/>
+          <a:ln/>
+        </p:spPr>
+        <p:txBody>
+          <a:bodyPr wrap="square" lIns="0" tIns="0" rIns="0" bIns="0" rtlCol="0" anchor="t"/>
+          <a:lstStyle/>
+          <a:p>
+            <a:pPr algn="ctr" indent="0" marL="0">
               <a:buNone/>
             </a:pPr>
             <a:r>
               <a:rPr lang="en-US" sz="900" dirty="0">
                 <a:solidFill>
-                  <a:srgbClr val="FFFFFF"/>
+                  <a:srgbClr val="59636E"/>
+                </a:solidFill>
+                <a:latin typeface="Arial" pitchFamily="34" charset="0"/>
+                <a:ea typeface="Arial" pitchFamily="34" charset="-122"/>
+                <a:cs typeface="Arial" pitchFamily="34" charset="-120"/>
+              </a:rPr>
+              <a:t>Codespaces</a:t>
+            </a:r>
+            <a:endParaRPr lang="en-US" sz="900" dirty="0"/>
+          </a:p>
+        </p:txBody>
+      </p:sp>
+      <p:sp>
+        <p:nvSpPr>
+          <p:cNvPr id="47" name="Shape 44"/>
+          <p:cNvSpPr/>
+          <p:nvPr/>
+        </p:nvSpPr>
+        <p:spPr>
+          <a:xfrm>
+            <a:off x="5486400" y="2514600"/>
+            <a:ext cx="3017520" cy="0"/>
+          </a:xfrm>
+          <a:prstGeom prst="line">
+            <a:avLst/>
+          </a:prstGeom>
+          <a:noFill/>
+          <a:ln w="9525">
+            <a:solidFill>
+              <a:srgbClr val="D0D7DE"/>
+            </a:solidFill>
+            <a:prstDash val="solid"/>
+          </a:ln>
+        </p:spPr>
+      </p:sp>
+      <p:sp>
+        <p:nvSpPr>
+          <p:cNvPr id="48" name="Text 45"/>
+          <p:cNvSpPr txBox="1"/>
+          <p:nvPr/>
+        </p:nvSpPr>
+        <p:spPr>
+          <a:xfrm>
+            <a:off x="5623560" y="2606040"/>
+            <a:ext cx="1371600" cy="237744"/>
+          </a:xfrm>
+          <a:prstGeom prst="rect">
+            <a:avLst/>
+          </a:prstGeom>
+          <a:noFill/>
+          <a:ln/>
+        </p:spPr>
+        <p:txBody>
+          <a:bodyPr wrap="square" lIns="0" tIns="0" rIns="0" bIns="0" rtlCol="0" anchor="t"/>
+          <a:lstStyle/>
+          <a:p>
+            <a:pPr indent="0" marL="0">
+              <a:buNone/>
+            </a:pPr>
+            <a:r>
+              <a:rPr lang="en-US" sz="950" b="1" dirty="0">
+                <a:solidFill>
+                  <a:srgbClr val="1F2328"/>
+                </a:solidFill>
+                <a:latin typeface="Arial" pitchFamily="34" charset="0"/>
+                <a:ea typeface="Arial" pitchFamily="34" charset="-122"/>
+                <a:cs typeface="Arial" pitchFamily="34" charset="-120"/>
+              </a:rPr>
+              <a:t>Clone</a:t>
+            </a:r>
+            <a:endParaRPr lang="en-US" sz="950" dirty="0"/>
+          </a:p>
+        </p:txBody>
+      </p:sp>
+      <p:sp>
+        <p:nvSpPr>
+          <p:cNvPr id="49" name="Text 46"/>
+          <p:cNvSpPr txBox="1"/>
+          <p:nvPr/>
+        </p:nvSpPr>
+        <p:spPr>
+          <a:xfrm>
+            <a:off x="5623560" y="2898648"/>
+            <a:ext cx="685800" cy="219456"/>
+          </a:xfrm>
+          <a:prstGeom prst="rect">
+            <a:avLst/>
+          </a:prstGeom>
+          <a:noFill/>
+          <a:ln/>
+        </p:spPr>
+        <p:txBody>
+          <a:bodyPr wrap="square" lIns="0" tIns="0" rIns="0" bIns="0" rtlCol="0" anchor="t"/>
+          <a:lstStyle/>
+          <a:p>
+            <a:pPr algn="ctr" indent="0" marL="0">
+              <a:buNone/>
+            </a:pPr>
+            <a:r>
+              <a:rPr lang="en-US" sz="850" b="1" dirty="0">
+                <a:solidFill>
+                  <a:srgbClr val="1F2328"/>
+                </a:solidFill>
+                <a:latin typeface="Arial" pitchFamily="34" charset="0"/>
+                <a:ea typeface="Arial" pitchFamily="34" charset="-122"/>
+                <a:cs typeface="Arial" pitchFamily="34" charset="-120"/>
+              </a:rPr>
+              <a:t>HTTPS</a:t>
+            </a:r>
+            <a:endParaRPr lang="en-US" sz="850" dirty="0"/>
+          </a:p>
+        </p:txBody>
+      </p:sp>
+      <p:sp>
+        <p:nvSpPr>
+          <p:cNvPr id="50" name="Text 47"/>
+          <p:cNvSpPr txBox="1"/>
+          <p:nvPr/>
+        </p:nvSpPr>
+        <p:spPr>
+          <a:xfrm>
+            <a:off x="6309360" y="2898648"/>
+            <a:ext cx="685800" cy="219456"/>
+          </a:xfrm>
+          <a:prstGeom prst="rect">
+            <a:avLst/>
+          </a:prstGeom>
+          <a:noFill/>
+          <a:ln/>
+        </p:spPr>
+        <p:txBody>
+          <a:bodyPr wrap="square" lIns="0" tIns="0" rIns="0" bIns="0" rtlCol="0" anchor="t"/>
+          <a:lstStyle/>
+          <a:p>
+            <a:pPr algn="ctr" indent="0" marL="0">
+              <a:buNone/>
+            </a:pPr>
+            <a:r>
+              <a:rPr lang="en-US" sz="850" dirty="0">
+                <a:solidFill>
+                  <a:srgbClr val="59636E"/>
+                </a:solidFill>
+                <a:latin typeface="Arial" pitchFamily="34" charset="0"/>
+                <a:ea typeface="Arial" pitchFamily="34" charset="-122"/>
+                <a:cs typeface="Arial" pitchFamily="34" charset="-120"/>
+              </a:rPr>
+              <a:t>SSH</a:t>
+            </a:r>
+            <a:endParaRPr lang="en-US" sz="850" dirty="0"/>
+          </a:p>
+        </p:txBody>
+      </p:sp>
+      <p:sp>
+        <p:nvSpPr>
+          <p:cNvPr id="51" name="Text 48"/>
+          <p:cNvSpPr txBox="1"/>
+          <p:nvPr/>
+        </p:nvSpPr>
+        <p:spPr>
+          <a:xfrm>
+            <a:off x="6995160" y="2898648"/>
+            <a:ext cx="685800" cy="219456"/>
+          </a:xfrm>
+          <a:prstGeom prst="rect">
+            <a:avLst/>
+          </a:prstGeom>
+          <a:noFill/>
+          <a:ln/>
+        </p:spPr>
+        <p:txBody>
+          <a:bodyPr wrap="square" lIns="0" tIns="0" rIns="0" bIns="0" rtlCol="0" anchor="t"/>
+          <a:lstStyle/>
+          <a:p>
+            <a:pPr algn="ctr" indent="0" marL="0">
+              <a:buNone/>
+            </a:pPr>
+            <a:r>
+              <a:rPr lang="en-US" sz="850" dirty="0">
+                <a:solidFill>
+                  <a:srgbClr val="59636E"/>
+                </a:solidFill>
+                <a:latin typeface="Arial" pitchFamily="34" charset="0"/>
+                <a:ea typeface="Arial" pitchFamily="34" charset="-122"/>
+                <a:cs typeface="Arial" pitchFamily="34" charset="-120"/>
+              </a:rPr>
+              <a:t>GitHub CLI</a:t>
+            </a:r>
+            <a:endParaRPr lang="en-US" sz="850" dirty="0"/>
+          </a:p>
+        </p:txBody>
+      </p:sp>
+      <p:sp>
+        <p:nvSpPr>
+          <p:cNvPr id="52" name="Shape 49"/>
+          <p:cNvSpPr/>
+          <p:nvPr/>
+        </p:nvSpPr>
+        <p:spPr>
+          <a:xfrm>
+            <a:off x="5669280" y="3136392"/>
+            <a:ext cx="594360" cy="0"/>
+          </a:xfrm>
+          <a:prstGeom prst="line">
+            <a:avLst/>
+          </a:prstGeom>
+          <a:noFill/>
+          <a:ln w="25400">
+            <a:solidFill>
+              <a:srgbClr val="FD8C73"/>
+            </a:solidFill>
+            <a:prstDash val="solid"/>
+          </a:ln>
+        </p:spPr>
+      </p:sp>
+      <p:sp>
+        <p:nvSpPr>
+          <p:cNvPr id="53" name="Shape 50"/>
+          <p:cNvSpPr/>
+          <p:nvPr/>
+        </p:nvSpPr>
+        <p:spPr>
+          <a:xfrm>
+            <a:off x="5623560" y="3291840"/>
+            <a:ext cx="2423160" cy="310896"/>
+          </a:xfrm>
+          <a:prstGeom prst="rect">
+            <a:avLst/>
+          </a:prstGeom>
+          <a:solidFill>
+            <a:srgbClr val="F6F8FA"/>
+          </a:solidFill>
+          <a:ln w="12700">
+            <a:solidFill>
+              <a:srgbClr val="D0D7DE"/>
+            </a:solidFill>
+            <a:prstDash val="solid"/>
+          </a:ln>
+        </p:spPr>
+      </p:sp>
+      <p:sp>
+        <p:nvSpPr>
+          <p:cNvPr id="54" name="Text 51"/>
+          <p:cNvSpPr txBox="1"/>
+          <p:nvPr/>
+        </p:nvSpPr>
+        <p:spPr>
+          <a:xfrm>
+            <a:off x="5687568" y="3291840"/>
+            <a:ext cx="2331720" cy="310896"/>
+          </a:xfrm>
+          <a:prstGeom prst="rect">
+            <a:avLst/>
+          </a:prstGeom>
+          <a:noFill/>
+          <a:ln/>
+        </p:spPr>
+        <p:txBody>
+          <a:bodyPr wrap="square" lIns="0" tIns="0" rIns="0" bIns="0" rtlCol="0" anchor="ctr"/>
+          <a:lstStyle/>
+          <a:p>
+            <a:pPr indent="0" marL="0">
+              <a:buNone/>
+            </a:pPr>
+            <a:r>
+              <a:rPr lang="en-US" sz="750" dirty="0">
+                <a:solidFill>
+                  <a:srgbClr val="1F2328"/>
                 </a:solidFill>
                 <a:latin typeface="Consolas" pitchFamily="34" charset="0"/>
                 <a:ea typeface="Consolas" pitchFamily="34" charset="-122"/>
                 <a:cs typeface="Consolas" pitchFamily="34" charset="-120"/>
               </a:rPr>
-              <a:t>&gt;Clone Repository in Container Volume</a:t>
-            </a:r>
-            <a:endParaRPr lang="en-US" sz="900" dirty="0"/>
-          </a:p>
-        </p:txBody>
-      </p:sp>
-      <p:sp>
-        <p:nvSpPr>
-          <p:cNvPr id="32" name="Shape 30"/>
+              <a:t>https://github.com/funITclub/wg-protein.git</a:t>
+            </a:r>
+            <a:endParaRPr lang="en-US" sz="750" dirty="0"/>
+          </a:p>
+        </p:txBody>
+      </p:sp>
+      <p:sp>
+        <p:nvSpPr>
+          <p:cNvPr id="55" name="Shape 52"/>
           <p:cNvSpPr/>
           <p:nvPr/>
         </p:nvSpPr>
         <p:spPr>
           <a:xfrm>
-            <a:off x="5166360" y="2148840"/>
-            <a:ext cx="3337560" cy="502920"/>
+            <a:off x="8092440" y="3291840"/>
+            <a:ext cx="292608" cy="310896"/>
           </a:xfrm>
           <a:prstGeom prst="rect">
             <a:avLst/>
           </a:prstGeom>
           <a:solidFill>
-            <a:srgbClr val="04395E"/>
+            <a:srgbClr val="F6F8FA"/>
           </a:solidFill>
           <a:ln w="12700">
             <a:solidFill>
-              <a:srgbClr val="04395E"/>
+              <a:srgbClr val="D0D7DE"/>
             </a:solidFill>
             <a:prstDash val="solid"/>
           </a:ln>
         </p:spPr>
       </p:sp>
-      <p:sp>
-        <p:nvSpPr>
-          <p:cNvPr id="33" name="Text 31"/>
-          <p:cNvSpPr txBox="1"/>
-          <p:nvPr/>
-        </p:nvSpPr>
-        <p:spPr>
-          <a:xfrm>
-            <a:off x="5257800" y="2176272"/>
-            <a:ext cx="3200400" cy="237744"/>
+      <p:pic>
+        <p:nvPicPr>
+          <p:cNvPr id="56" name="Image 1" descr="preencoded.png">    </p:cNvPr>
+          <p:cNvPicPr>
+            <a:picLocks noChangeAspect="1"/>
+          </p:cNvPicPr>
+          <p:nvPr/>
+        </p:nvPicPr>
+        <p:blipFill>
+          <a:blip r:embed="rId2"/>
+          <a:stretch>
+            <a:fillRect/>
+          </a:stretch>
+        </p:blipFill>
+        <p:spPr>
+          <a:xfrm>
+            <a:off x="8165592" y="3364992"/>
+            <a:ext cx="146304" cy="164592"/>
+          </a:xfrm>
+          <a:prstGeom prst="rect">
+            <a:avLst/>
+          </a:prstGeom>
+        </p:spPr>
+      </p:pic>
+      <p:sp>
+        <p:nvSpPr>
+          <p:cNvPr id="57" name="Text 53"/>
+          <p:cNvSpPr txBox="1"/>
+          <p:nvPr/>
+        </p:nvSpPr>
+        <p:spPr>
+          <a:xfrm>
+            <a:off x="5623560" y="3703320"/>
+            <a:ext cx="2743200" cy="237744"/>
           </a:xfrm>
           <a:prstGeom prst="rect">
             <a:avLst/>
@@ -3754,34 +4611,34 @@
           <a:bodyPr wrap="square" lIns="0" tIns="0" rIns="0" bIns="0" rtlCol="0" anchor="t"/>
           <a:lstStyle/>
           <a:p>
-            <a:pPr indent="0" marL="0">
-              <a:buNone/>
-            </a:pPr>
-            <a:r>
-              <a:rPr lang="en-US" sz="900" b="1" dirty="0">
-                <a:solidFill>
-                  <a:srgbClr val="FFFFFF"/>
+            <a:pPr algn="r" indent="0" marL="0">
+              <a:buNone/>
+            </a:pPr>
+            <a:r>
+              <a:rPr lang="en-US" sz="850" b="1" dirty="0">
+                <a:solidFill>
+                  <a:srgbClr val="1A4A70"/>
                 </a:solidFill>
                 <a:latin typeface="Meiryo" pitchFamily="34" charset="0"/>
                 <a:ea typeface="Meiryo" pitchFamily="34" charset="-122"/>
                 <a:cs typeface="Meiryo" pitchFamily="34" charset="-120"/>
               </a:rPr>
-              <a:t>開発コンテナー: コンテナー ボリュームにリポジトリを複製...</a:t>
-            </a:r>
-            <a:endParaRPr lang="en-US" sz="900" dirty="0"/>
-          </a:p>
-        </p:txBody>
-      </p:sp>
-      <p:sp>
-        <p:nvSpPr>
-          <p:cNvPr id="34" name="Text 32"/>
-          <p:cNvSpPr txBox="1"/>
-          <p:nvPr/>
-        </p:nvSpPr>
-        <p:spPr>
-          <a:xfrm>
-            <a:off x="5257800" y="2404872"/>
-            <a:ext cx="3200400" cy="201168"/>
+              <a:t>← ここを押すとコピーされる</a:t>
+            </a:r>
+            <a:endParaRPr lang="en-US" sz="850" dirty="0"/>
+          </a:p>
+        </p:txBody>
+      </p:sp>
+      <p:sp>
+        <p:nvSpPr>
+          <p:cNvPr id="58" name="Text 54"/>
+          <p:cNvSpPr txBox="1"/>
+          <p:nvPr/>
+        </p:nvSpPr>
+        <p:spPr>
+          <a:xfrm>
+            <a:off x="457200" y="4663440"/>
+            <a:ext cx="8229600" cy="365760"/>
           </a:xfrm>
           <a:prstGeom prst="rect">
             <a:avLst/>
@@ -3797,199 +4654,15 @@
               <a:buNone/>
             </a:pPr>
             <a:r>
-              <a:rPr lang="en-US" sz="750" dirty="0">
-                <a:solidFill>
-                  <a:srgbClr val="CCCCCC"/>
-                </a:solidFill>
-                <a:latin typeface="Arial" pitchFamily="34" charset="0"/>
-                <a:ea typeface="Arial" pitchFamily="34" charset="-122"/>
-                <a:cs typeface="Arial" pitchFamily="34" charset="-120"/>
-              </a:rPr>
-              <a:t>Dev Containers: Clone Repository in Container Volume...</a:t>
-            </a:r>
-            <a:endParaRPr lang="en-US" sz="750" dirty="0"/>
-          </a:p>
-        </p:txBody>
-      </p:sp>
-      <p:sp>
-        <p:nvSpPr>
-          <p:cNvPr id="35" name="Text 33"/>
-          <p:cNvSpPr txBox="1"/>
-          <p:nvPr/>
-        </p:nvSpPr>
-        <p:spPr>
-          <a:xfrm>
-            <a:off x="5212080" y="2880360"/>
-            <a:ext cx="1828800" cy="237744"/>
-          </a:xfrm>
-          <a:prstGeom prst="rect">
-            <a:avLst/>
-          </a:prstGeom>
-          <a:noFill/>
-          <a:ln/>
-        </p:spPr>
-        <p:txBody>
-          <a:bodyPr wrap="square" lIns="0" tIns="0" rIns="0" bIns="0" rtlCol="0" anchor="t"/>
-          <a:lstStyle/>
-          <a:p>
-            <a:pPr indent="0" marL="0">
-              <a:buNone/>
-            </a:pPr>
-            <a:r>
-              <a:rPr lang="en-US" sz="950" b="1" dirty="0">
-                <a:solidFill>
-                  <a:srgbClr val="5BB8FF"/>
+              <a:rPr lang="en-US" sz="1050" dirty="0">
+                <a:solidFill>
+                  <a:srgbClr val="5A6B7B"/>
                 </a:solidFill>
                 <a:latin typeface="Meiryo" pitchFamily="34" charset="0"/>
                 <a:ea typeface="Meiryo" pitchFamily="34" charset="-122"/>
                 <a:cs typeface="Meiryo" pitchFamily="34" charset="-120"/>
               </a:rPr>
-              <a:t>URL の例</a:t>
-            </a:r>
-            <a:endParaRPr lang="en-US" sz="950" dirty="0"/>
-          </a:p>
-        </p:txBody>
-      </p:sp>
-      <p:sp>
-        <p:nvSpPr>
-          <p:cNvPr id="36" name="Shape 34"/>
-          <p:cNvSpPr/>
-          <p:nvPr/>
-        </p:nvSpPr>
-        <p:spPr>
-          <a:xfrm>
-            <a:off x="5166360" y="3154680"/>
-            <a:ext cx="3337560" cy="310896"/>
-          </a:xfrm>
-          <a:prstGeom prst="rect">
-            <a:avLst/>
-          </a:prstGeom>
-          <a:solidFill>
-            <a:srgbClr val="3C3C3C"/>
-          </a:solidFill>
-          <a:ln w="12700">
-            <a:solidFill>
-              <a:srgbClr val="555555"/>
-            </a:solidFill>
-            <a:prstDash val="solid"/>
-          </a:ln>
-        </p:spPr>
-      </p:sp>
-      <p:sp>
-        <p:nvSpPr>
-          <p:cNvPr id="37" name="Text 35"/>
-          <p:cNvSpPr txBox="1"/>
-          <p:nvPr/>
-        </p:nvSpPr>
-        <p:spPr>
-          <a:xfrm>
-            <a:off x="5257800" y="3154680"/>
-            <a:ext cx="3246120" cy="310896"/>
-          </a:xfrm>
-          <a:prstGeom prst="rect">
-            <a:avLst/>
-          </a:prstGeom>
-          <a:noFill/>
-          <a:ln/>
-        </p:spPr>
-        <p:txBody>
-          <a:bodyPr wrap="square" lIns="0" tIns="0" rIns="0" bIns="0" rtlCol="0" anchor="ctr"/>
-          <a:lstStyle/>
-          <a:p>
-            <a:pPr indent="0" marL="0">
-              <a:buNone/>
-            </a:pPr>
-            <a:r>
-              <a:rPr lang="en-US" sz="950" dirty="0">
-                <a:solidFill>
-                  <a:srgbClr val="FFFFFF"/>
-                </a:solidFill>
-                <a:latin typeface="Consolas" pitchFamily="34" charset="0"/>
-                <a:ea typeface="Consolas" pitchFamily="34" charset="-122"/>
-                <a:cs typeface="Consolas" pitchFamily="34" charset="-120"/>
-              </a:rPr>
-              <a:t>https://github.com/funITclub/wg-&lt;名前&gt;</a:t>
-            </a:r>
-            <a:endParaRPr lang="en-US" sz="950" dirty="0"/>
-          </a:p>
-        </p:txBody>
-      </p:sp>
-      <p:sp>
-        <p:nvSpPr>
-          <p:cNvPr id="38" name="Shape 36"/>
-          <p:cNvSpPr/>
-          <p:nvPr/>
-        </p:nvSpPr>
-        <p:spPr>
-          <a:xfrm>
-            <a:off x="5166360" y="3657600"/>
-            <a:ext cx="3337560" cy="731520"/>
-          </a:xfrm>
-          <a:prstGeom prst="rect">
-            <a:avLst/>
-          </a:prstGeom>
-          <a:solidFill>
-            <a:srgbClr val="0A2A4A"/>
-          </a:solidFill>
-          <a:ln w="12700">
-            <a:solidFill>
-              <a:srgbClr val="0A2A4A"/>
-            </a:solidFill>
-            <a:prstDash val="solid"/>
-          </a:ln>
-        </p:spPr>
-      </p:sp>
-      <p:sp>
-        <p:nvSpPr>
-          <p:cNvPr id="39" name="Text 37"/>
-          <p:cNvSpPr txBox="1"/>
-          <p:nvPr/>
-        </p:nvSpPr>
-        <p:spPr>
-          <a:xfrm>
-            <a:off x="5303520" y="3730752"/>
-            <a:ext cx="3063240" cy="594360"/>
-          </a:xfrm>
-          <a:prstGeom prst="rect">
-            <a:avLst/>
-          </a:prstGeom>
-          <a:noFill/>
-          <a:ln/>
-        </p:spPr>
-        <p:txBody>
-          <a:bodyPr wrap="square" lIns="0" tIns="0" rIns="0" bIns="0" rtlCol="0" anchor="ctr"/>
-          <a:lstStyle/>
-          <a:p>
-            <a:pPr indent="0" marL="0">
-              <a:buNone/>
-            </a:pPr>
-            <a:r>
-              <a:rPr lang="en-US" sz="1050" b="1" dirty="0">
-                <a:solidFill>
-                  <a:srgbClr val="5BB8FF"/>
-                </a:solidFill>
-                <a:latin typeface="Consolas" pitchFamily="34" charset="0"/>
-                <a:ea typeface="Consolas" pitchFamily="34" charset="-122"/>
-                <a:cs typeface="Consolas" pitchFamily="34" charset="-120"/>
-              </a:rPr>
-              <a:t>準備ができました。</a:t>
-            </a:r>
-            <a:endParaRPr lang="en-US" sz="1050" dirty="0"/>
-          </a:p>
-          <a:p>
-            <a:pPr indent="0" marL="0">
-              <a:buNone/>
-            </a:pPr>
-            <a:r>
-              <a:rPr lang="en-US" sz="1050" b="1" dirty="0">
-                <a:solidFill>
-                  <a:srgbClr val="5BB8FF"/>
-                </a:solidFill>
-                <a:latin typeface="Consolas" pitchFamily="34" charset="0"/>
-                <a:ea typeface="Consolas" pitchFamily="34" charset="-122"/>
-                <a:cs typeface="Consolas" pitchFamily="34" charset="-120"/>
-              </a:rPr>
-              <a:t>F5 でサイトを起動できます。</a:t>
+              <a:t>リポジトリの名前は WG のチームと同じ（例：wg-protein）。分からなければ WG の仲間か運営に聞く。</a:t>
             </a:r>
             <a:endParaRPr lang="en-US" sz="1050" dirty="0"/>
           </a:p>
@@ -4060,7 +4733,7 @@
                 <a:ea typeface="Consolas" pitchFamily="34" charset="-122"/>
                 <a:cs typeface="Consolas" pitchFamily="34" charset="-120"/>
               </a:rPr>
-              <a:t>// 02  ·  手順 8 / 8</a:t>
+              <a:t>// 02  ·  手順 7 / 8（2 / 2）</a:t>
             </a:r>
             <a:endParaRPr lang="en-US" sz="1100" dirty="0"/>
           </a:p>
@@ -4099,7 +4772,7 @@
                 <a:ea typeface="Meiryo" pitchFamily="34" charset="-122"/>
                 <a:cs typeface="Meiryo" pitchFamily="34" charset="-120"/>
               </a:rPr>
-              <a:t>サイトを起動して確かめる</a:t>
+              <a:t>VS Code でクローンして開く</a:t>
             </a:r>
             <a:endParaRPr lang="en-US" sz="2600" dirty="0"/>
           </a:p>
@@ -4113,7 +4786,7 @@
         </p:nvSpPr>
         <p:spPr>
           <a:xfrm>
-            <a:off x="457200" y="1417320"/>
+            <a:off x="457200" y="1371600"/>
             <a:ext cx="310896" cy="310896"/>
           </a:xfrm>
           <a:prstGeom prst="ellipse">
@@ -4138,7 +4811,7 @@
         </p:nvSpPr>
         <p:spPr>
           <a:xfrm>
-            <a:off x="457200" y="1417320"/>
+            <a:off x="457200" y="1371600"/>
             <a:ext cx="310896" cy="310896"/>
           </a:xfrm>
           <a:prstGeom prst="rect">
@@ -4177,8 +4850,8 @@
         </p:nvSpPr>
         <p:spPr>
           <a:xfrm>
-            <a:off x="896112" y="1426464"/>
-            <a:ext cx="3767328" cy="274320"/>
+            <a:off x="896112" y="1380744"/>
+            <a:ext cx="3858768" cy="274320"/>
           </a:xfrm>
           <a:prstGeom prst="rect">
             <a:avLst/>
@@ -4202,7 +4875,7 @@
                 <a:ea typeface="Meiryo" pitchFamily="34" charset="-122"/>
                 <a:cs typeface="Meiryo" pitchFamily="34" charset="-120"/>
               </a:rPr>
-              <a:t>左下を確かめる</a:t>
+              <a:t>Docker Desktop を起動しておく</a:t>
             </a:r>
             <a:endParaRPr lang="en-US" sz="1250" dirty="0"/>
           </a:p>
@@ -4216,8 +4889,8 @@
         </p:nvSpPr>
         <p:spPr>
           <a:xfrm>
-            <a:off x="896112" y="1691640"/>
-            <a:ext cx="3767328" cy="457200"/>
+            <a:off x="896112" y="1645920"/>
+            <a:ext cx="3858768" cy="347472"/>
           </a:xfrm>
           <a:prstGeom prst="rect">
             <a:avLst/>
@@ -4241,7 +4914,7 @@
                 <a:ea typeface="Meiryo" pitchFamily="34" charset="-122"/>
                 <a:cs typeface="Meiryo" pitchFamily="34" charset="-120"/>
               </a:rPr>
-              <a:t>「開発コンテナー: funITclub …」と出ていれば作業部屋の中</a:t>
+              <a:t>左下が緑の Engine running になるまで待つ</a:t>
             </a:r>
             <a:endParaRPr lang="en-US" sz="1050" dirty="0"/>
           </a:p>
@@ -4255,7 +4928,7 @@
         </p:nvSpPr>
         <p:spPr>
           <a:xfrm>
-            <a:off x="457200" y="2167128"/>
+            <a:off x="457200" y="2011680"/>
             <a:ext cx="310896" cy="310896"/>
           </a:xfrm>
           <a:prstGeom prst="ellipse">
@@ -4280,7 +4953,7 @@
         </p:nvSpPr>
         <p:spPr>
           <a:xfrm>
-            <a:off x="457200" y="2167128"/>
+            <a:off x="457200" y="2011680"/>
             <a:ext cx="310896" cy="310896"/>
           </a:xfrm>
           <a:prstGeom prst="rect">
@@ -4319,8 +4992,8 @@
         </p:nvSpPr>
         <p:spPr>
           <a:xfrm>
-            <a:off x="896112" y="2176272"/>
-            <a:ext cx="3767328" cy="274320"/>
+            <a:off x="896112" y="2020824"/>
+            <a:ext cx="3858768" cy="274320"/>
           </a:xfrm>
           <a:prstGeom prst="rect">
             <a:avLst/>
@@ -4344,7 +5017,7 @@
                 <a:ea typeface="Meiryo" pitchFamily="34" charset="-122"/>
                 <a:cs typeface="Meiryo" pitchFamily="34" charset="-120"/>
               </a:rPr>
-              <a:t>F5 キーを押す</a:t>
+              <a:t>「表示」→「コマンド パレット」</a:t>
             </a:r>
             <a:endParaRPr lang="en-US" sz="1250" dirty="0"/>
           </a:p>
@@ -4358,8 +5031,8 @@
         </p:nvSpPr>
         <p:spPr>
           <a:xfrm>
-            <a:off x="896112" y="2441448"/>
-            <a:ext cx="3767328" cy="457200"/>
+            <a:off x="896112" y="2286000"/>
+            <a:ext cx="3858768" cy="347472"/>
           </a:xfrm>
           <a:prstGeom prst="rect">
             <a:avLst/>
@@ -4383,7 +5056,7 @@
                 <a:ea typeface="Meiryo" pitchFamily="34" charset="-122"/>
                 <a:cs typeface="Meiryo" pitchFamily="34" charset="-120"/>
               </a:rPr>
-              <a:t>Mac のノートは fn + F5。「実行」→「デバッグの開始」でもよい</a:t>
+              <a:t>Ctrl + Shift + P（Mac は Cmd + Shift + P）</a:t>
             </a:r>
             <a:endParaRPr lang="en-US" sz="1050" dirty="0"/>
           </a:p>
@@ -4397,7 +5070,7 @@
         </p:nvSpPr>
         <p:spPr>
           <a:xfrm>
-            <a:off x="457200" y="2916936"/>
+            <a:off x="457200" y="2651760"/>
             <a:ext cx="310896" cy="310896"/>
           </a:xfrm>
           <a:prstGeom prst="ellipse">
@@ -4422,7 +5095,7 @@
         </p:nvSpPr>
         <p:spPr>
           <a:xfrm>
-            <a:off x="457200" y="2916936"/>
+            <a:off x="457200" y="2651760"/>
             <a:ext cx="310896" cy="310896"/>
           </a:xfrm>
           <a:prstGeom prst="rect">
@@ -4461,8 +5134,8 @@
         </p:nvSpPr>
         <p:spPr>
           <a:xfrm>
-            <a:off x="896112" y="2926080"/>
-            <a:ext cx="3767328" cy="274320"/>
+            <a:off x="896112" y="2660904"/>
+            <a:ext cx="3858768" cy="274320"/>
           </a:xfrm>
           <a:prstGeom prst="rect">
             <a:avLst/>
@@ -4486,7 +5159,7 @@
                 <a:ea typeface="Meiryo" pitchFamily="34" charset="-122"/>
                 <a:cs typeface="Meiryo" pitchFamily="34" charset="-120"/>
               </a:rPr>
-              <a:t>「ブラウザーで開く」を押す</a:t>
+              <a:t>Clone Repository in Container Volume</a:t>
             </a:r>
             <a:endParaRPr lang="en-US" sz="1250" dirty="0"/>
           </a:p>
@@ -4500,8 +5173,8 @@
         </p:nvSpPr>
         <p:spPr>
           <a:xfrm>
-            <a:off x="896112" y="3191256"/>
-            <a:ext cx="3767328" cy="457200"/>
+            <a:off x="896112" y="2926080"/>
+            <a:ext cx="3858768" cy="347472"/>
           </a:xfrm>
           <a:prstGeom prst="rect">
             <a:avLst/>
@@ -4525,7 +5198,7 @@
                 <a:ea typeface="Meiryo" pitchFamily="34" charset="-122"/>
                 <a:cs typeface="Meiryo" pitchFamily="34" charset="-120"/>
               </a:rPr>
-              <a:t>出なければブラウザで http://localhost:8000/</a:t>
+              <a:t>と入力し、出てきた項目を選ぶ（右の画面）</a:t>
             </a:r>
             <a:endParaRPr lang="en-US" sz="1050" dirty="0"/>
           </a:p>
@@ -4539,7 +5212,7 @@
         </p:nvSpPr>
         <p:spPr>
           <a:xfrm>
-            <a:off x="457200" y="3666744"/>
+            <a:off x="457200" y="3291840"/>
             <a:ext cx="310896" cy="310896"/>
           </a:xfrm>
           <a:prstGeom prst="ellipse">
@@ -4564,7 +5237,7 @@
         </p:nvSpPr>
         <p:spPr>
           <a:xfrm>
-            <a:off x="457200" y="3666744"/>
+            <a:off x="457200" y="3291840"/>
             <a:ext cx="310896" cy="310896"/>
           </a:xfrm>
           <a:prstGeom prst="rect">
@@ -4603,8 +5276,8 @@
         </p:nvSpPr>
         <p:spPr>
           <a:xfrm>
-            <a:off x="896112" y="3675888"/>
-            <a:ext cx="3767328" cy="274320"/>
+            <a:off x="896112" y="3300984"/>
+            <a:ext cx="3858768" cy="274320"/>
           </a:xfrm>
           <a:prstGeom prst="rect">
             <a:avLst/>
@@ -4628,7 +5301,7 @@
                 <a:ea typeface="Meiryo" pitchFamily="34" charset="-122"/>
                 <a:cs typeface="Meiryo" pitchFamily="34" charset="-120"/>
               </a:rPr>
-              <a:t>止めるときは ■ ボタン</a:t>
+              <a:t>コピーした URL を貼って Enter</a:t>
             </a:r>
             <a:endParaRPr lang="en-US" sz="1250" dirty="0"/>
           </a:p>
@@ -4642,8 +5315,8 @@
         </p:nvSpPr>
         <p:spPr>
           <a:xfrm>
-            <a:off x="896112" y="3941064"/>
-            <a:ext cx="3767328" cy="457200"/>
+            <a:off x="896112" y="3566160"/>
+            <a:ext cx="3858768" cy="347472"/>
           </a:xfrm>
           <a:prstGeom prst="rect">
             <a:avLst/>
@@ -4667,7 +5340,7 @@
                 <a:ea typeface="Meiryo" pitchFamily="34" charset="-122"/>
                 <a:cs typeface="Meiryo" pitchFamily="34" charset="-120"/>
               </a:rPr>
-              <a:t>または Shift + F5</a:t>
+              <a:t>警告が出たら funITclub の URL か確かめて進む</a:t>
             </a:r>
             <a:endParaRPr lang="en-US" sz="1050" dirty="0"/>
           </a:p>
@@ -4681,8 +5354,150 @@
         </p:nvSpPr>
         <p:spPr>
           <a:xfrm>
-            <a:off x="4937760" y="1417320"/>
-            <a:ext cx="3749040" cy="3017520"/>
+            <a:off x="457200" y="3931920"/>
+            <a:ext cx="310896" cy="310896"/>
+          </a:xfrm>
+          <a:prstGeom prst="ellipse">
+            <a:avLst/>
+          </a:prstGeom>
+          <a:solidFill>
+            <a:srgbClr val="001E3C"/>
+          </a:solidFill>
+          <a:ln w="12700">
+            <a:solidFill>
+              <a:srgbClr val="001E3C"/>
+            </a:solidFill>
+            <a:prstDash val="solid"/>
+          </a:ln>
+        </p:spPr>
+      </p:sp>
+      <p:sp>
+        <p:nvSpPr>
+          <p:cNvPr id="21" name="Text 19"/>
+          <p:cNvSpPr txBox="1"/>
+          <p:nvPr/>
+        </p:nvSpPr>
+        <p:spPr>
+          <a:xfrm>
+            <a:off x="457200" y="3931920"/>
+            <a:ext cx="310896" cy="310896"/>
+          </a:xfrm>
+          <a:prstGeom prst="rect">
+            <a:avLst/>
+          </a:prstGeom>
+          <a:noFill/>
+          <a:ln/>
+        </p:spPr>
+        <p:txBody>
+          <a:bodyPr wrap="square" lIns="0" tIns="0" rIns="0" bIns="0" rtlCol="0" anchor="ctr"/>
+          <a:lstStyle/>
+          <a:p>
+            <a:pPr algn="ctr" indent="0" marL="0">
+              <a:buNone/>
+            </a:pPr>
+            <a:r>
+              <a:rPr lang="en-US" sz="1100" b="1" dirty="0">
+                <a:solidFill>
+                  <a:srgbClr val="FFFFFF"/>
+                </a:solidFill>
+                <a:latin typeface="Consolas" pitchFamily="34" charset="0"/>
+                <a:ea typeface="Consolas" pitchFamily="34" charset="-122"/>
+                <a:cs typeface="Consolas" pitchFamily="34" charset="-120"/>
+              </a:rPr>
+              <a:t>5</a:t>
+            </a:r>
+            <a:endParaRPr lang="en-US" sz="1100" dirty="0"/>
+          </a:p>
+        </p:txBody>
+      </p:sp>
+      <p:sp>
+        <p:nvSpPr>
+          <p:cNvPr id="22" name="Text 20"/>
+          <p:cNvSpPr txBox="1"/>
+          <p:nvPr/>
+        </p:nvSpPr>
+        <p:spPr>
+          <a:xfrm>
+            <a:off x="896112" y="3941064"/>
+            <a:ext cx="3858768" cy="274320"/>
+          </a:xfrm>
+          <a:prstGeom prst="rect">
+            <a:avLst/>
+          </a:prstGeom>
+          <a:noFill/>
+          <a:ln/>
+        </p:spPr>
+        <p:txBody>
+          <a:bodyPr wrap="square" lIns="0" tIns="0" rIns="0" bIns="0" rtlCol="0" anchor="t"/>
+          <a:lstStyle/>
+          <a:p>
+            <a:pPr indent="0" marL="0">
+              <a:buNone/>
+            </a:pPr>
+            <a:r>
+              <a:rPr lang="en-US" sz="1250" b="1" dirty="0">
+                <a:solidFill>
+                  <a:srgbClr val="001E3C"/>
+                </a:solidFill>
+                <a:latin typeface="Meiryo" pitchFamily="34" charset="0"/>
+                <a:ea typeface="Meiryo" pitchFamily="34" charset="-122"/>
+                <a:cs typeface="Meiryo" pitchFamily="34" charset="-120"/>
+              </a:rPr>
+              <a:t>5〜10 分待つ</a:t>
+            </a:r>
+            <a:endParaRPr lang="en-US" sz="1250" dirty="0"/>
+          </a:p>
+        </p:txBody>
+      </p:sp>
+      <p:sp>
+        <p:nvSpPr>
+          <p:cNvPr id="23" name="Text 21"/>
+          <p:cNvSpPr txBox="1"/>
+          <p:nvPr/>
+        </p:nvSpPr>
+        <p:spPr>
+          <a:xfrm>
+            <a:off x="896112" y="4206240"/>
+            <a:ext cx="3858768" cy="347472"/>
+          </a:xfrm>
+          <a:prstGeom prst="rect">
+            <a:avLst/>
+          </a:prstGeom>
+          <a:noFill/>
+          <a:ln/>
+        </p:spPr>
+        <p:txBody>
+          <a:bodyPr wrap="square" lIns="0" tIns="0" rIns="0" bIns="0" rtlCol="0" anchor="t"/>
+          <a:lstStyle/>
+          <a:p>
+            <a:pPr indent="0" marL="0">
+              <a:buNone/>
+            </a:pPr>
+            <a:r>
+              <a:rPr lang="en-US" sz="1050" dirty="0">
+                <a:solidFill>
+                  <a:srgbClr val="1B2B3A"/>
+                </a:solidFill>
+                <a:latin typeface="Meiryo" pitchFamily="34" charset="0"/>
+                <a:ea typeface="Meiryo" pitchFamily="34" charset="-122"/>
+                <a:cs typeface="Meiryo" pitchFamily="34" charset="-120"/>
+              </a:rPr>
+              <a:t>「準備ができました。」と出たら完了</a:t>
+            </a:r>
+            <a:endParaRPr lang="en-US" sz="1050" dirty="0"/>
+          </a:p>
+        </p:txBody>
+      </p:sp>
+      <p:sp>
+        <p:nvSpPr>
+          <p:cNvPr id="24" name="Shape 22"/>
+          <p:cNvSpPr/>
+          <p:nvPr/>
+        </p:nvSpPr>
+        <p:spPr>
+          <a:xfrm>
+            <a:off x="4983480" y="1371600"/>
+            <a:ext cx="3703320" cy="3246120"/>
           </a:xfrm>
           <a:prstGeom prst="rect">
             <a:avLst/>
@@ -4707,14 +5522,14 @@
       </p:sp>
       <p:sp>
         <p:nvSpPr>
-          <p:cNvPr id="21" name="Shape 19"/>
+          <p:cNvPr id="25" name="Shape 23"/>
           <p:cNvSpPr/>
           <p:nvPr/>
         </p:nvSpPr>
         <p:spPr>
           <a:xfrm>
-            <a:off x="4937760" y="1417320"/>
-            <a:ext cx="3749040" cy="274320"/>
+            <a:off x="4983480" y="1371600"/>
+            <a:ext cx="3703320" cy="274320"/>
           </a:xfrm>
           <a:prstGeom prst="rect">
             <a:avLst/>
@@ -4732,13 +5547,13 @@
       </p:sp>
       <p:sp>
         <p:nvSpPr>
-          <p:cNvPr id="22" name="Shape 20"/>
+          <p:cNvPr id="26" name="Shape 24"/>
           <p:cNvSpPr/>
           <p:nvPr/>
         </p:nvSpPr>
         <p:spPr>
           <a:xfrm>
-            <a:off x="5065776" y="1508760"/>
+            <a:off x="5111496" y="1463040"/>
             <a:ext cx="91440" cy="91440"/>
           </a:xfrm>
           <a:prstGeom prst="ellipse">
@@ -4757,13 +5572,13 @@
       </p:sp>
       <p:sp>
         <p:nvSpPr>
-          <p:cNvPr id="23" name="Shape 21"/>
+          <p:cNvPr id="27" name="Shape 25"/>
           <p:cNvSpPr/>
           <p:nvPr/>
         </p:nvSpPr>
         <p:spPr>
           <a:xfrm>
-            <a:off x="5230368" y="1508760"/>
+            <a:off x="5276088" y="1463040"/>
             <a:ext cx="91440" cy="91440"/>
           </a:xfrm>
           <a:prstGeom prst="ellipse">
@@ -4782,13 +5597,13 @@
       </p:sp>
       <p:sp>
         <p:nvSpPr>
-          <p:cNvPr id="24" name="Shape 22"/>
+          <p:cNvPr id="28" name="Shape 26"/>
           <p:cNvSpPr/>
           <p:nvPr/>
         </p:nvSpPr>
         <p:spPr>
           <a:xfrm>
-            <a:off x="5394960" y="1508760"/>
+            <a:off x="5440680" y="1463040"/>
             <a:ext cx="91440" cy="91440"/>
           </a:xfrm>
           <a:prstGeom prst="ellipse">
@@ -4807,14 +5622,14 @@
       </p:sp>
       <p:sp>
         <p:nvSpPr>
-          <p:cNvPr id="25" name="Text 23"/>
-          <p:cNvSpPr txBox="1"/>
-          <p:nvPr/>
-        </p:nvSpPr>
-        <p:spPr>
-          <a:xfrm>
-            <a:off x="5623560" y="1417320"/>
-            <a:ext cx="2926080" cy="274320"/>
+          <p:cNvPr id="29" name="Text 27"/>
+          <p:cNvSpPr txBox="1"/>
+          <p:nvPr/>
+        </p:nvSpPr>
+        <p:spPr>
+          <a:xfrm>
+            <a:off x="5669280" y="1371600"/>
+            <a:ext cx="2880360" cy="274320"/>
           </a:xfrm>
           <a:prstGeom prst="rect">
             <a:avLst/>
@@ -4838,7 +5653,7 @@
                 <a:ea typeface="Meiryo" pitchFamily="34" charset="-122"/>
                 <a:cs typeface="Meiryo" pitchFamily="34" charset="-120"/>
               </a:rPr>
-              <a:t>VS Code</a:t>
+              <a:t>コマンド パレット</a:t>
             </a:r>
             <a:endParaRPr lang="en-US" sz="900" dirty="0"/>
           </a:p>
@@ -4846,115 +5661,20 @@
       </p:sp>
       <p:sp>
         <p:nvSpPr>
-          <p:cNvPr id="26" name="Shape 24"/>
+          <p:cNvPr id="30" name="Shape 28"/>
           <p:cNvSpPr/>
           <p:nvPr/>
         </p:nvSpPr>
         <p:spPr>
           <a:xfrm>
-            <a:off x="5760720" y="2148840"/>
-            <a:ext cx="2743200" cy="1051560"/>
+            <a:off x="5166360" y="1783080"/>
+            <a:ext cx="3337560" cy="310896"/>
           </a:xfrm>
           <a:prstGeom prst="rect">
             <a:avLst/>
           </a:prstGeom>
           <a:solidFill>
-            <a:srgbClr val="252526"/>
-          </a:solidFill>
-          <a:ln w="12700">
-            <a:solidFill>
-              <a:srgbClr val="454545"/>
-            </a:solidFill>
-            <a:prstDash val="solid"/>
-          </a:ln>
-          <a:effectLst>
-            <a:outerShdw sx="100000" sy="100000" kx="0" ky="0" algn="bl" rotWithShape="0" blurRad="76200" dist="25400" dir="5400000">
-              <a:srgbClr val="000000">
-                <a:alpha val="12000"/>
-              </a:srgbClr>
-            </a:outerShdw>
-          </a:effectLst>
-        </p:spPr>
-      </p:sp>
-      <p:pic>
-        <p:nvPicPr>
-          <p:cNvPr id="27" name="Image 0" descr="preencoded.png">    </p:cNvPr>
-          <p:cNvPicPr>
-            <a:picLocks noChangeAspect="1"/>
-          </p:cNvPicPr>
-          <p:nvPr/>
-        </p:nvPicPr>
-        <p:blipFill>
-          <a:blip r:embed="rId1"/>
-          <a:stretch>
-            <a:fillRect/>
-          </a:stretch>
-        </p:blipFill>
-        <p:spPr>
-          <a:xfrm>
-            <a:off x="5897880" y="2286000"/>
-            <a:ext cx="164592" cy="164592"/>
-          </a:xfrm>
-          <a:prstGeom prst="rect">
-            <a:avLst/>
-          </a:prstGeom>
-        </p:spPr>
-      </p:pic>
-      <p:sp>
-        <p:nvSpPr>
-          <p:cNvPr id="28" name="Text 25"/>
-          <p:cNvSpPr txBox="1"/>
-          <p:nvPr/>
-        </p:nvSpPr>
-        <p:spPr>
-          <a:xfrm>
-            <a:off x="6144768" y="2240280"/>
-            <a:ext cx="2286000" cy="457200"/>
-          </a:xfrm>
-          <a:prstGeom prst="rect">
-            <a:avLst/>
-          </a:prstGeom>
-          <a:noFill/>
-          <a:ln/>
-        </p:spPr>
-        <p:txBody>
-          <a:bodyPr wrap="square" lIns="0" tIns="0" rIns="0" bIns="0" rtlCol="0" anchor="t"/>
-          <a:lstStyle/>
-          <a:p>
-            <a:pPr indent="0" marL="0">
-              <a:buNone/>
-            </a:pPr>
-            <a:r>
-              <a:rPr lang="en-US" sz="900" dirty="0">
-                <a:solidFill>
-                  <a:srgbClr val="CCCCCC"/>
-                </a:solidFill>
-                <a:latin typeface="Meiryo" pitchFamily="34" charset="0"/>
-                <a:ea typeface="Meiryo" pitchFamily="34" charset="-122"/>
-                <a:cs typeface="Meiryo" pitchFamily="34" charset="-120"/>
-              </a:rPr>
-              <a:t>ポート 8000 で実行されているアプリケーションは使用可能です。</a:t>
-            </a:r>
-            <a:endParaRPr lang="en-US" sz="900" dirty="0"/>
-          </a:p>
-        </p:txBody>
-      </p:sp>
-      <p:sp>
-        <p:nvSpPr>
-          <p:cNvPr id="29" name="Shape 26"/>
-          <p:cNvSpPr/>
-          <p:nvPr/>
-        </p:nvSpPr>
-        <p:spPr>
-          <a:xfrm>
-            <a:off x="7452360" y="2807208"/>
-            <a:ext cx="1005840" cy="274320"/>
-          </a:xfrm>
-          <a:prstGeom prst="rect">
-            <a:avLst/>
-          </a:prstGeom>
-          <a:solidFill>
-            <a:srgbClr val="0078D4"/>
+            <a:srgbClr val="3C3C3C"/>
           </a:solidFill>
           <a:ln w="12700">
             <a:solidFill>
@@ -4966,14 +5686,14 @@
       </p:sp>
       <p:sp>
         <p:nvSpPr>
-          <p:cNvPr id="30" name="Text 27"/>
-          <p:cNvSpPr txBox="1"/>
-          <p:nvPr/>
-        </p:nvSpPr>
-        <p:spPr>
-          <a:xfrm>
-            <a:off x="7452360" y="2807208"/>
-            <a:ext cx="1005840" cy="274320"/>
+          <p:cNvPr id="31" name="Text 29"/>
+          <p:cNvSpPr txBox="1"/>
+          <p:nvPr/>
+        </p:nvSpPr>
+        <p:spPr>
+          <a:xfrm>
+            <a:off x="5257800" y="1783080"/>
+            <a:ext cx="3246120" cy="310896"/>
           </a:xfrm>
           <a:prstGeom prst="rect">
             <a:avLst/>
@@ -4985,11 +5705,75 @@
           <a:bodyPr wrap="square" lIns="0" tIns="0" rIns="0" bIns="0" rtlCol="0" anchor="ctr"/>
           <a:lstStyle/>
           <a:p>
-            <a:pPr algn="ctr" indent="0" marL="0">
-              <a:buNone/>
-            </a:pPr>
-            <a:r>
-              <a:rPr lang="en-US" sz="850" dirty="0">
+            <a:pPr indent="0" marL="0">
+              <a:buNone/>
+            </a:pPr>
+            <a:r>
+              <a:rPr lang="en-US" sz="900" dirty="0">
+                <a:solidFill>
+                  <a:srgbClr val="FFFFFF"/>
+                </a:solidFill>
+                <a:latin typeface="Consolas" pitchFamily="34" charset="0"/>
+                <a:ea typeface="Consolas" pitchFamily="34" charset="-122"/>
+                <a:cs typeface="Consolas" pitchFamily="34" charset="-120"/>
+              </a:rPr>
+              <a:t>&gt;Clone Repository in Container Volume</a:t>
+            </a:r>
+            <a:endParaRPr lang="en-US" sz="900" dirty="0"/>
+          </a:p>
+        </p:txBody>
+      </p:sp>
+      <p:sp>
+        <p:nvSpPr>
+          <p:cNvPr id="32" name="Shape 30"/>
+          <p:cNvSpPr/>
+          <p:nvPr/>
+        </p:nvSpPr>
+        <p:spPr>
+          <a:xfrm>
+            <a:off x="5166360" y="2148840"/>
+            <a:ext cx="3337560" cy="502920"/>
+          </a:xfrm>
+          <a:prstGeom prst="rect">
+            <a:avLst/>
+          </a:prstGeom>
+          <a:solidFill>
+            <a:srgbClr val="04395E"/>
+          </a:solidFill>
+          <a:ln w="12700">
+            <a:solidFill>
+              <a:srgbClr val="04395E"/>
+            </a:solidFill>
+            <a:prstDash val="solid"/>
+          </a:ln>
+        </p:spPr>
+      </p:sp>
+      <p:sp>
+        <p:nvSpPr>
+          <p:cNvPr id="33" name="Text 31"/>
+          <p:cNvSpPr txBox="1"/>
+          <p:nvPr/>
+        </p:nvSpPr>
+        <p:spPr>
+          <a:xfrm>
+            <a:off x="5257800" y="2176272"/>
+            <a:ext cx="3200400" cy="237744"/>
+          </a:xfrm>
+          <a:prstGeom prst="rect">
+            <a:avLst/>
+          </a:prstGeom>
+          <a:noFill/>
+          <a:ln/>
+        </p:spPr>
+        <p:txBody>
+          <a:bodyPr wrap="square" lIns="0" tIns="0" rIns="0" bIns="0" rtlCol="0" anchor="t"/>
+          <a:lstStyle/>
+          <a:p>
+            <a:pPr indent="0" marL="0">
+              <a:buNone/>
+            </a:pPr>
+            <a:r>
+              <a:rPr lang="en-US" sz="900" b="1" dirty="0">
                 <a:solidFill>
                   <a:srgbClr val="FFFFFF"/>
                 </a:solidFill>
@@ -4997,32 +5781,110 @@
                 <a:ea typeface="Meiryo" pitchFamily="34" charset="-122"/>
                 <a:cs typeface="Meiryo" pitchFamily="34" charset="-120"/>
               </a:rPr>
-              <a:t>ブラウザーで開く</a:t>
-            </a:r>
-            <a:endParaRPr lang="en-US" sz="850" dirty="0"/>
-          </a:p>
-        </p:txBody>
-      </p:sp>
-      <p:sp>
-        <p:nvSpPr>
-          <p:cNvPr id="31" name="Shape 28"/>
+              <a:t>開発コンテナー: コンテナー ボリュームにリポジトリを複製...</a:t>
+            </a:r>
+            <a:endParaRPr lang="en-US" sz="900" dirty="0"/>
+          </a:p>
+        </p:txBody>
+      </p:sp>
+      <p:sp>
+        <p:nvSpPr>
+          <p:cNvPr id="34" name="Text 32"/>
+          <p:cNvSpPr txBox="1"/>
+          <p:nvPr/>
+        </p:nvSpPr>
+        <p:spPr>
+          <a:xfrm>
+            <a:off x="5257800" y="2404872"/>
+            <a:ext cx="3200400" cy="201168"/>
+          </a:xfrm>
+          <a:prstGeom prst="rect">
+            <a:avLst/>
+          </a:prstGeom>
+          <a:noFill/>
+          <a:ln/>
+        </p:spPr>
+        <p:txBody>
+          <a:bodyPr wrap="square" lIns="0" tIns="0" rIns="0" bIns="0" rtlCol="0" anchor="t"/>
+          <a:lstStyle/>
+          <a:p>
+            <a:pPr indent="0" marL="0">
+              <a:buNone/>
+            </a:pPr>
+            <a:r>
+              <a:rPr lang="en-US" sz="750" dirty="0">
+                <a:solidFill>
+                  <a:srgbClr val="CCCCCC"/>
+                </a:solidFill>
+                <a:latin typeface="Arial" pitchFamily="34" charset="0"/>
+                <a:ea typeface="Arial" pitchFamily="34" charset="-122"/>
+                <a:cs typeface="Arial" pitchFamily="34" charset="-120"/>
+              </a:rPr>
+              <a:t>Dev Containers: Clone Repository in Container Volume...</a:t>
+            </a:r>
+            <a:endParaRPr lang="en-US" sz="750" dirty="0"/>
+          </a:p>
+        </p:txBody>
+      </p:sp>
+      <p:sp>
+        <p:nvSpPr>
+          <p:cNvPr id="35" name="Text 33"/>
+          <p:cNvSpPr txBox="1"/>
+          <p:nvPr/>
+        </p:nvSpPr>
+        <p:spPr>
+          <a:xfrm>
+            <a:off x="5212080" y="2880360"/>
+            <a:ext cx="1828800" cy="237744"/>
+          </a:xfrm>
+          <a:prstGeom prst="rect">
+            <a:avLst/>
+          </a:prstGeom>
+          <a:noFill/>
+          <a:ln/>
+        </p:spPr>
+        <p:txBody>
+          <a:bodyPr wrap="square" lIns="0" tIns="0" rIns="0" bIns="0" rtlCol="0" anchor="t"/>
+          <a:lstStyle/>
+          <a:p>
+            <a:pPr indent="0" marL="0">
+              <a:buNone/>
+            </a:pPr>
+            <a:r>
+              <a:rPr lang="en-US" sz="950" b="1" dirty="0">
+                <a:solidFill>
+                  <a:srgbClr val="5BB8FF"/>
+                </a:solidFill>
+                <a:latin typeface="Meiryo" pitchFamily="34" charset="0"/>
+                <a:ea typeface="Meiryo" pitchFamily="34" charset="-122"/>
+                <a:cs typeface="Meiryo" pitchFamily="34" charset="-120"/>
+              </a:rPr>
+              <a:t>URL の例</a:t>
+            </a:r>
+            <a:endParaRPr lang="en-US" sz="950" dirty="0"/>
+          </a:p>
+        </p:txBody>
+      </p:sp>
+      <p:sp>
+        <p:nvSpPr>
+          <p:cNvPr id="36" name="Shape 34"/>
           <p:cNvSpPr/>
           <p:nvPr/>
         </p:nvSpPr>
         <p:spPr>
           <a:xfrm>
-            <a:off x="5120640" y="3383280"/>
-            <a:ext cx="3383280" cy="640080"/>
+            <a:off x="5166360" y="3154680"/>
+            <a:ext cx="3337560" cy="310896"/>
           </a:xfrm>
           <a:prstGeom prst="rect">
             <a:avLst/>
           </a:prstGeom>
           <a:solidFill>
-            <a:srgbClr val="181818"/>
+            <a:srgbClr val="3C3C3C"/>
           </a:solidFill>
           <a:ln w="12700">
             <a:solidFill>
-              <a:srgbClr val="333333"/>
+              <a:srgbClr val="555555"/>
             </a:solidFill>
             <a:prstDash val="solid"/>
           </a:ln>
@@ -5030,14 +5892,14 @@
       </p:sp>
       <p:sp>
         <p:nvSpPr>
-          <p:cNvPr id="32" name="Text 29"/>
-          <p:cNvSpPr txBox="1"/>
-          <p:nvPr/>
-        </p:nvSpPr>
-        <p:spPr>
-          <a:xfrm>
-            <a:off x="5212080" y="3429000"/>
-            <a:ext cx="3200400" cy="548640"/>
+          <p:cNvPr id="37" name="Text 35"/>
+          <p:cNvSpPr txBox="1"/>
+          <p:nvPr/>
+        </p:nvSpPr>
+        <p:spPr>
+          <a:xfrm>
+            <a:off x="5257800" y="3154680"/>
+            <a:ext cx="3246120" cy="310896"/>
           </a:xfrm>
           <a:prstGeom prst="rect">
             <a:avLst/>
@@ -5053,40 +5915,40 @@
               <a:buNone/>
             </a:pPr>
             <a:r>
-              <a:rPr lang="en-US" sz="850" dirty="0">
-                <a:solidFill>
-                  <a:srgbClr val="CCCCCC"/>
+              <a:rPr lang="en-US" sz="950" dirty="0">
+                <a:solidFill>
+                  <a:srgbClr val="FFFFFF"/>
                 </a:solidFill>
                 <a:latin typeface="Consolas" pitchFamily="34" charset="0"/>
                 <a:ea typeface="Consolas" pitchFamily="34" charset="-122"/>
                 <a:cs typeface="Consolas" pitchFamily="34" charset="-120"/>
               </a:rPr>
-              <a:t>Starting development server at http://127.0.0.1:8000/</a:t>
-            </a:r>
-            <a:endParaRPr lang="en-US" sz="850" dirty="0"/>
-          </a:p>
-        </p:txBody>
-      </p:sp>
-      <p:sp>
-        <p:nvSpPr>
-          <p:cNvPr id="33" name="Shape 30"/>
+              <a:t>https://github.com/funITclub/wg-&lt;名前&gt;</a:t>
+            </a:r>
+            <a:endParaRPr lang="en-US" sz="950" dirty="0"/>
+          </a:p>
+        </p:txBody>
+      </p:sp>
+      <p:sp>
+        <p:nvSpPr>
+          <p:cNvPr id="38" name="Shape 36"/>
           <p:cNvSpPr/>
           <p:nvPr/>
         </p:nvSpPr>
         <p:spPr>
           <a:xfrm>
-            <a:off x="4937760" y="4160520"/>
-            <a:ext cx="3749040" cy="274320"/>
+            <a:off x="5166360" y="3657600"/>
+            <a:ext cx="3337560" cy="731520"/>
           </a:xfrm>
           <a:prstGeom prst="rect">
             <a:avLst/>
           </a:prstGeom>
           <a:solidFill>
-            <a:srgbClr val="181818"/>
+            <a:srgbClr val="0A2A4A"/>
           </a:solidFill>
           <a:ln w="12700">
             <a:solidFill>
-              <a:srgbClr val="181818"/>
+              <a:srgbClr val="0A2A4A"/>
             </a:solidFill>
             <a:prstDash val="solid"/>
           </a:ln>
@@ -5094,39 +5956,14 @@
       </p:sp>
       <p:sp>
         <p:nvSpPr>
-          <p:cNvPr id="34" name="Shape 31"/>
-          <p:cNvSpPr/>
-          <p:nvPr/>
-        </p:nvSpPr>
-        <p:spPr>
-          <a:xfrm>
-            <a:off x="4937760" y="4160520"/>
-            <a:ext cx="2377440" cy="274320"/>
-          </a:xfrm>
-          <a:prstGeom prst="rect">
-            <a:avLst/>
-          </a:prstGeom>
-          <a:solidFill>
-            <a:srgbClr val="0078D4"/>
-          </a:solidFill>
-          <a:ln w="12700">
-            <a:solidFill>
-              <a:srgbClr val="0078D4"/>
-            </a:solidFill>
-            <a:prstDash val="solid"/>
-          </a:ln>
-        </p:spPr>
-      </p:sp>
-      <p:sp>
-        <p:nvSpPr>
-          <p:cNvPr id="35" name="Text 32"/>
-          <p:cNvSpPr txBox="1"/>
-          <p:nvPr/>
-        </p:nvSpPr>
-        <p:spPr>
-          <a:xfrm>
-            <a:off x="5029200" y="4160520"/>
-            <a:ext cx="2286000" cy="274320"/>
+          <p:cNvPr id="39" name="Text 37"/>
+          <p:cNvSpPr txBox="1"/>
+          <p:nvPr/>
+        </p:nvSpPr>
+        <p:spPr>
+          <a:xfrm>
+            <a:off x="5303520" y="3730752"/>
+            <a:ext cx="3063240" cy="594360"/>
           </a:xfrm>
           <a:prstGeom prst="rect">
             <a:avLst/>
@@ -5142,54 +5979,32 @@
               <a:buNone/>
             </a:pPr>
             <a:r>
-              <a:rPr lang="en-US" sz="900" dirty="0">
-                <a:solidFill>
-                  <a:srgbClr val="FFFFFF"/>
-                </a:solidFill>
-                <a:latin typeface="Meiryo" pitchFamily="34" charset="0"/>
-                <a:ea typeface="Meiryo" pitchFamily="34" charset="-122"/>
-                <a:cs typeface="Meiryo" pitchFamily="34" charset="-120"/>
-              </a:rPr>
-              <a:t>&gt;&lt; 開発コンテナー: funITclub WG</a:t>
-            </a:r>
-            <a:endParaRPr lang="en-US" sz="900" dirty="0"/>
-          </a:p>
-        </p:txBody>
-      </p:sp>
-      <p:sp>
-        <p:nvSpPr>
-          <p:cNvPr id="36" name="Text 33"/>
-          <p:cNvSpPr txBox="1"/>
-          <p:nvPr/>
-        </p:nvSpPr>
-        <p:spPr>
-          <a:xfrm>
-            <a:off x="457200" y="4572000"/>
-            <a:ext cx="8229600" cy="365760"/>
-          </a:xfrm>
-          <a:prstGeom prst="rect">
-            <a:avLst/>
-          </a:prstGeom>
-          <a:noFill/>
-          <a:ln/>
-        </p:spPr>
-        <p:txBody>
-          <a:bodyPr wrap="square" lIns="0" tIns="0" rIns="0" bIns="0" rtlCol="0" anchor="t"/>
-          <a:lstStyle/>
-          <a:p>
-            <a:pPr indent="0" marL="0">
-              <a:buNone/>
-            </a:pPr>
-            <a:r>
-              <a:rPr lang="en-US" sz="1050" dirty="0">
-                <a:solidFill>
-                  <a:srgbClr val="5A6B7B"/>
-                </a:solidFill>
-                <a:latin typeface="Meiryo" pitchFamily="34" charset="0"/>
-                <a:ea typeface="Meiryo" pitchFamily="34" charset="-122"/>
-                <a:cs typeface="Meiryo" pitchFamily="34" charset="-120"/>
-              </a:rPr>
-              <a:t>サイトが表示されたら準備は終わり。毎日の作業は資料 03「開発の進め方」へ。</a:t>
+              <a:rPr lang="en-US" sz="1050" b="1" dirty="0">
+                <a:solidFill>
+                  <a:srgbClr val="5BB8FF"/>
+                </a:solidFill>
+                <a:latin typeface="Consolas" pitchFamily="34" charset="0"/>
+                <a:ea typeface="Consolas" pitchFamily="34" charset="-122"/>
+                <a:cs typeface="Consolas" pitchFamily="34" charset="-120"/>
+              </a:rPr>
+              <a:t>準備ができました。</a:t>
+            </a:r>
+            <a:endParaRPr lang="en-US" sz="1050" dirty="0"/>
+          </a:p>
+          <a:p>
+            <a:pPr indent="0" marL="0">
+              <a:buNone/>
+            </a:pPr>
+            <a:r>
+              <a:rPr lang="en-US" sz="1050" b="1" dirty="0">
+                <a:solidFill>
+                  <a:srgbClr val="5BB8FF"/>
+                </a:solidFill>
+                <a:latin typeface="Consolas" pitchFamily="34" charset="0"/>
+                <a:ea typeface="Consolas" pitchFamily="34" charset="-122"/>
+                <a:cs typeface="Consolas" pitchFamily="34" charset="-120"/>
+              </a:rPr>
+              <a:t>F5 でサイトを起動できます。</a:t>
             </a:r>
             <a:endParaRPr lang="en-US" sz="1050" dirty="0"/>
           </a:p>
@@ -5260,7 +6075,7 @@
                 <a:ea typeface="Consolas" pitchFamily="34" charset="-122"/>
                 <a:cs typeface="Consolas" pitchFamily="34" charset="-120"/>
               </a:rPr>
-              <a:t>// 02  ·  困ったとき</a:t>
+              <a:t>// 02  ·  手順 8 / 8</a:t>
             </a:r>
             <a:endParaRPr lang="en-US" sz="1100" dirty="0"/>
           </a:p>
@@ -5299,6 +6114,1206 @@
                 <a:ea typeface="Meiryo" pitchFamily="34" charset="-122"/>
                 <a:cs typeface="Meiryo" pitchFamily="34" charset="-120"/>
               </a:rPr>
+              <a:t>サイトを起動して確かめる</a:t>
+            </a:r>
+            <a:endParaRPr lang="en-US" sz="2600" dirty="0"/>
+          </a:p>
+        </p:txBody>
+      </p:sp>
+      <p:sp>
+        <p:nvSpPr>
+          <p:cNvPr id="4" name="Shape 2"/>
+          <p:cNvSpPr/>
+          <p:nvPr/>
+        </p:nvSpPr>
+        <p:spPr>
+          <a:xfrm>
+            <a:off x="457200" y="1417320"/>
+            <a:ext cx="310896" cy="310896"/>
+          </a:xfrm>
+          <a:prstGeom prst="ellipse">
+            <a:avLst/>
+          </a:prstGeom>
+          <a:solidFill>
+            <a:srgbClr val="001E3C"/>
+          </a:solidFill>
+          <a:ln w="12700">
+            <a:solidFill>
+              <a:srgbClr val="001E3C"/>
+            </a:solidFill>
+            <a:prstDash val="solid"/>
+          </a:ln>
+        </p:spPr>
+      </p:sp>
+      <p:sp>
+        <p:nvSpPr>
+          <p:cNvPr id="5" name="Text 3"/>
+          <p:cNvSpPr txBox="1"/>
+          <p:nvPr/>
+        </p:nvSpPr>
+        <p:spPr>
+          <a:xfrm>
+            <a:off x="457200" y="1417320"/>
+            <a:ext cx="310896" cy="310896"/>
+          </a:xfrm>
+          <a:prstGeom prst="rect">
+            <a:avLst/>
+          </a:prstGeom>
+          <a:noFill/>
+          <a:ln/>
+        </p:spPr>
+        <p:txBody>
+          <a:bodyPr wrap="square" lIns="0" tIns="0" rIns="0" bIns="0" rtlCol="0" anchor="ctr"/>
+          <a:lstStyle/>
+          <a:p>
+            <a:pPr algn="ctr" indent="0" marL="0">
+              <a:buNone/>
+            </a:pPr>
+            <a:r>
+              <a:rPr lang="en-US" sz="1100" b="1" dirty="0">
+                <a:solidFill>
+                  <a:srgbClr val="FFFFFF"/>
+                </a:solidFill>
+                <a:latin typeface="Consolas" pitchFamily="34" charset="0"/>
+                <a:ea typeface="Consolas" pitchFamily="34" charset="-122"/>
+                <a:cs typeface="Consolas" pitchFamily="34" charset="-120"/>
+              </a:rPr>
+              <a:t>1</a:t>
+            </a:r>
+            <a:endParaRPr lang="en-US" sz="1100" dirty="0"/>
+          </a:p>
+        </p:txBody>
+      </p:sp>
+      <p:sp>
+        <p:nvSpPr>
+          <p:cNvPr id="6" name="Text 4"/>
+          <p:cNvSpPr txBox="1"/>
+          <p:nvPr/>
+        </p:nvSpPr>
+        <p:spPr>
+          <a:xfrm>
+            <a:off x="896112" y="1426464"/>
+            <a:ext cx="3767328" cy="274320"/>
+          </a:xfrm>
+          <a:prstGeom prst="rect">
+            <a:avLst/>
+          </a:prstGeom>
+          <a:noFill/>
+          <a:ln/>
+        </p:spPr>
+        <p:txBody>
+          <a:bodyPr wrap="square" lIns="0" tIns="0" rIns="0" bIns="0" rtlCol="0" anchor="t"/>
+          <a:lstStyle/>
+          <a:p>
+            <a:pPr indent="0" marL="0">
+              <a:buNone/>
+            </a:pPr>
+            <a:r>
+              <a:rPr lang="en-US" sz="1250" b="1" dirty="0">
+                <a:solidFill>
+                  <a:srgbClr val="001E3C"/>
+                </a:solidFill>
+                <a:latin typeface="Meiryo" pitchFamily="34" charset="0"/>
+                <a:ea typeface="Meiryo" pitchFamily="34" charset="-122"/>
+                <a:cs typeface="Meiryo" pitchFamily="34" charset="-120"/>
+              </a:rPr>
+              <a:t>左下を確かめる</a:t>
+            </a:r>
+            <a:endParaRPr lang="en-US" sz="1250" dirty="0"/>
+          </a:p>
+        </p:txBody>
+      </p:sp>
+      <p:sp>
+        <p:nvSpPr>
+          <p:cNvPr id="7" name="Text 5"/>
+          <p:cNvSpPr txBox="1"/>
+          <p:nvPr/>
+        </p:nvSpPr>
+        <p:spPr>
+          <a:xfrm>
+            <a:off x="896112" y="1691640"/>
+            <a:ext cx="3767328" cy="457200"/>
+          </a:xfrm>
+          <a:prstGeom prst="rect">
+            <a:avLst/>
+          </a:prstGeom>
+          <a:noFill/>
+          <a:ln/>
+        </p:spPr>
+        <p:txBody>
+          <a:bodyPr wrap="square" lIns="0" tIns="0" rIns="0" bIns="0" rtlCol="0" anchor="t"/>
+          <a:lstStyle/>
+          <a:p>
+            <a:pPr indent="0" marL="0">
+              <a:buNone/>
+            </a:pPr>
+            <a:r>
+              <a:rPr lang="en-US" sz="1050" dirty="0">
+                <a:solidFill>
+                  <a:srgbClr val="1B2B3A"/>
+                </a:solidFill>
+                <a:latin typeface="Meiryo" pitchFamily="34" charset="0"/>
+                <a:ea typeface="Meiryo" pitchFamily="34" charset="-122"/>
+                <a:cs typeface="Meiryo" pitchFamily="34" charset="-120"/>
+              </a:rPr>
+              <a:t>「開発コンテナー: funITclub …」と出ていれば作業部屋の中</a:t>
+            </a:r>
+            <a:endParaRPr lang="en-US" sz="1050" dirty="0"/>
+          </a:p>
+        </p:txBody>
+      </p:sp>
+      <p:sp>
+        <p:nvSpPr>
+          <p:cNvPr id="8" name="Shape 6"/>
+          <p:cNvSpPr/>
+          <p:nvPr/>
+        </p:nvSpPr>
+        <p:spPr>
+          <a:xfrm>
+            <a:off x="457200" y="2167128"/>
+            <a:ext cx="310896" cy="310896"/>
+          </a:xfrm>
+          <a:prstGeom prst="ellipse">
+            <a:avLst/>
+          </a:prstGeom>
+          <a:solidFill>
+            <a:srgbClr val="001E3C"/>
+          </a:solidFill>
+          <a:ln w="12700">
+            <a:solidFill>
+              <a:srgbClr val="001E3C"/>
+            </a:solidFill>
+            <a:prstDash val="solid"/>
+          </a:ln>
+        </p:spPr>
+      </p:sp>
+      <p:sp>
+        <p:nvSpPr>
+          <p:cNvPr id="9" name="Text 7"/>
+          <p:cNvSpPr txBox="1"/>
+          <p:nvPr/>
+        </p:nvSpPr>
+        <p:spPr>
+          <a:xfrm>
+            <a:off x="457200" y="2167128"/>
+            <a:ext cx="310896" cy="310896"/>
+          </a:xfrm>
+          <a:prstGeom prst="rect">
+            <a:avLst/>
+          </a:prstGeom>
+          <a:noFill/>
+          <a:ln/>
+        </p:spPr>
+        <p:txBody>
+          <a:bodyPr wrap="square" lIns="0" tIns="0" rIns="0" bIns="0" rtlCol="0" anchor="ctr"/>
+          <a:lstStyle/>
+          <a:p>
+            <a:pPr algn="ctr" indent="0" marL="0">
+              <a:buNone/>
+            </a:pPr>
+            <a:r>
+              <a:rPr lang="en-US" sz="1100" b="1" dirty="0">
+                <a:solidFill>
+                  <a:srgbClr val="FFFFFF"/>
+                </a:solidFill>
+                <a:latin typeface="Consolas" pitchFamily="34" charset="0"/>
+                <a:ea typeface="Consolas" pitchFamily="34" charset="-122"/>
+                <a:cs typeface="Consolas" pitchFamily="34" charset="-120"/>
+              </a:rPr>
+              <a:t>2</a:t>
+            </a:r>
+            <a:endParaRPr lang="en-US" sz="1100" dirty="0"/>
+          </a:p>
+        </p:txBody>
+      </p:sp>
+      <p:sp>
+        <p:nvSpPr>
+          <p:cNvPr id="10" name="Text 8"/>
+          <p:cNvSpPr txBox="1"/>
+          <p:nvPr/>
+        </p:nvSpPr>
+        <p:spPr>
+          <a:xfrm>
+            <a:off x="896112" y="2176272"/>
+            <a:ext cx="3767328" cy="274320"/>
+          </a:xfrm>
+          <a:prstGeom prst="rect">
+            <a:avLst/>
+          </a:prstGeom>
+          <a:noFill/>
+          <a:ln/>
+        </p:spPr>
+        <p:txBody>
+          <a:bodyPr wrap="square" lIns="0" tIns="0" rIns="0" bIns="0" rtlCol="0" anchor="t"/>
+          <a:lstStyle/>
+          <a:p>
+            <a:pPr indent="0" marL="0">
+              <a:buNone/>
+            </a:pPr>
+            <a:r>
+              <a:rPr lang="en-US" sz="1250" b="1" dirty="0">
+                <a:solidFill>
+                  <a:srgbClr val="001E3C"/>
+                </a:solidFill>
+                <a:latin typeface="Meiryo" pitchFamily="34" charset="0"/>
+                <a:ea typeface="Meiryo" pitchFamily="34" charset="-122"/>
+                <a:cs typeface="Meiryo" pitchFamily="34" charset="-120"/>
+              </a:rPr>
+              <a:t>F5 キーを押す</a:t>
+            </a:r>
+            <a:endParaRPr lang="en-US" sz="1250" dirty="0"/>
+          </a:p>
+        </p:txBody>
+      </p:sp>
+      <p:sp>
+        <p:nvSpPr>
+          <p:cNvPr id="11" name="Text 9"/>
+          <p:cNvSpPr txBox="1"/>
+          <p:nvPr/>
+        </p:nvSpPr>
+        <p:spPr>
+          <a:xfrm>
+            <a:off x="896112" y="2441448"/>
+            <a:ext cx="3767328" cy="457200"/>
+          </a:xfrm>
+          <a:prstGeom prst="rect">
+            <a:avLst/>
+          </a:prstGeom>
+          <a:noFill/>
+          <a:ln/>
+        </p:spPr>
+        <p:txBody>
+          <a:bodyPr wrap="square" lIns="0" tIns="0" rIns="0" bIns="0" rtlCol="0" anchor="t"/>
+          <a:lstStyle/>
+          <a:p>
+            <a:pPr indent="0" marL="0">
+              <a:buNone/>
+            </a:pPr>
+            <a:r>
+              <a:rPr lang="en-US" sz="1050" dirty="0">
+                <a:solidFill>
+                  <a:srgbClr val="1B2B3A"/>
+                </a:solidFill>
+                <a:latin typeface="Meiryo" pitchFamily="34" charset="0"/>
+                <a:ea typeface="Meiryo" pitchFamily="34" charset="-122"/>
+                <a:cs typeface="Meiryo" pitchFamily="34" charset="-120"/>
+              </a:rPr>
+              <a:t>Mac のノートは fn + F5。「実行」→「デバッグの開始」でもよい</a:t>
+            </a:r>
+            <a:endParaRPr lang="en-US" sz="1050" dirty="0"/>
+          </a:p>
+        </p:txBody>
+      </p:sp>
+      <p:sp>
+        <p:nvSpPr>
+          <p:cNvPr id="12" name="Shape 10"/>
+          <p:cNvSpPr/>
+          <p:nvPr/>
+        </p:nvSpPr>
+        <p:spPr>
+          <a:xfrm>
+            <a:off x="457200" y="2916936"/>
+            <a:ext cx="310896" cy="310896"/>
+          </a:xfrm>
+          <a:prstGeom prst="ellipse">
+            <a:avLst/>
+          </a:prstGeom>
+          <a:solidFill>
+            <a:srgbClr val="001E3C"/>
+          </a:solidFill>
+          <a:ln w="12700">
+            <a:solidFill>
+              <a:srgbClr val="001E3C"/>
+            </a:solidFill>
+            <a:prstDash val="solid"/>
+          </a:ln>
+        </p:spPr>
+      </p:sp>
+      <p:sp>
+        <p:nvSpPr>
+          <p:cNvPr id="13" name="Text 11"/>
+          <p:cNvSpPr txBox="1"/>
+          <p:nvPr/>
+        </p:nvSpPr>
+        <p:spPr>
+          <a:xfrm>
+            <a:off x="457200" y="2916936"/>
+            <a:ext cx="310896" cy="310896"/>
+          </a:xfrm>
+          <a:prstGeom prst="rect">
+            <a:avLst/>
+          </a:prstGeom>
+          <a:noFill/>
+          <a:ln/>
+        </p:spPr>
+        <p:txBody>
+          <a:bodyPr wrap="square" lIns="0" tIns="0" rIns="0" bIns="0" rtlCol="0" anchor="ctr"/>
+          <a:lstStyle/>
+          <a:p>
+            <a:pPr algn="ctr" indent="0" marL="0">
+              <a:buNone/>
+            </a:pPr>
+            <a:r>
+              <a:rPr lang="en-US" sz="1100" b="1" dirty="0">
+                <a:solidFill>
+                  <a:srgbClr val="FFFFFF"/>
+                </a:solidFill>
+                <a:latin typeface="Consolas" pitchFamily="34" charset="0"/>
+                <a:ea typeface="Consolas" pitchFamily="34" charset="-122"/>
+                <a:cs typeface="Consolas" pitchFamily="34" charset="-120"/>
+              </a:rPr>
+              <a:t>3</a:t>
+            </a:r>
+            <a:endParaRPr lang="en-US" sz="1100" dirty="0"/>
+          </a:p>
+        </p:txBody>
+      </p:sp>
+      <p:sp>
+        <p:nvSpPr>
+          <p:cNvPr id="14" name="Text 12"/>
+          <p:cNvSpPr txBox="1"/>
+          <p:nvPr/>
+        </p:nvSpPr>
+        <p:spPr>
+          <a:xfrm>
+            <a:off x="896112" y="2926080"/>
+            <a:ext cx="3767328" cy="274320"/>
+          </a:xfrm>
+          <a:prstGeom prst="rect">
+            <a:avLst/>
+          </a:prstGeom>
+          <a:noFill/>
+          <a:ln/>
+        </p:spPr>
+        <p:txBody>
+          <a:bodyPr wrap="square" lIns="0" tIns="0" rIns="0" bIns="0" rtlCol="0" anchor="t"/>
+          <a:lstStyle/>
+          <a:p>
+            <a:pPr indent="0" marL="0">
+              <a:buNone/>
+            </a:pPr>
+            <a:r>
+              <a:rPr lang="en-US" sz="1250" b="1" dirty="0">
+                <a:solidFill>
+                  <a:srgbClr val="001E3C"/>
+                </a:solidFill>
+                <a:latin typeface="Meiryo" pitchFamily="34" charset="0"/>
+                <a:ea typeface="Meiryo" pitchFamily="34" charset="-122"/>
+                <a:cs typeface="Meiryo" pitchFamily="34" charset="-120"/>
+              </a:rPr>
+              <a:t>「ブラウザーで開く」を押す</a:t>
+            </a:r>
+            <a:endParaRPr lang="en-US" sz="1250" dirty="0"/>
+          </a:p>
+        </p:txBody>
+      </p:sp>
+      <p:sp>
+        <p:nvSpPr>
+          <p:cNvPr id="15" name="Text 13"/>
+          <p:cNvSpPr txBox="1"/>
+          <p:nvPr/>
+        </p:nvSpPr>
+        <p:spPr>
+          <a:xfrm>
+            <a:off x="896112" y="3191256"/>
+            <a:ext cx="3767328" cy="457200"/>
+          </a:xfrm>
+          <a:prstGeom prst="rect">
+            <a:avLst/>
+          </a:prstGeom>
+          <a:noFill/>
+          <a:ln/>
+        </p:spPr>
+        <p:txBody>
+          <a:bodyPr wrap="square" lIns="0" tIns="0" rIns="0" bIns="0" rtlCol="0" anchor="t"/>
+          <a:lstStyle/>
+          <a:p>
+            <a:pPr indent="0" marL="0">
+              <a:buNone/>
+            </a:pPr>
+            <a:r>
+              <a:rPr lang="en-US" sz="1050" dirty="0">
+                <a:solidFill>
+                  <a:srgbClr val="1B2B3A"/>
+                </a:solidFill>
+                <a:latin typeface="Meiryo" pitchFamily="34" charset="0"/>
+                <a:ea typeface="Meiryo" pitchFamily="34" charset="-122"/>
+                <a:cs typeface="Meiryo" pitchFamily="34" charset="-120"/>
+              </a:rPr>
+              <a:t>出なければブラウザで http://localhost:8000/</a:t>
+            </a:r>
+            <a:endParaRPr lang="en-US" sz="1050" dirty="0"/>
+          </a:p>
+        </p:txBody>
+      </p:sp>
+      <p:sp>
+        <p:nvSpPr>
+          <p:cNvPr id="16" name="Shape 14"/>
+          <p:cNvSpPr/>
+          <p:nvPr/>
+        </p:nvSpPr>
+        <p:spPr>
+          <a:xfrm>
+            <a:off x="457200" y="3666744"/>
+            <a:ext cx="310896" cy="310896"/>
+          </a:xfrm>
+          <a:prstGeom prst="ellipse">
+            <a:avLst/>
+          </a:prstGeom>
+          <a:solidFill>
+            <a:srgbClr val="001E3C"/>
+          </a:solidFill>
+          <a:ln w="12700">
+            <a:solidFill>
+              <a:srgbClr val="001E3C"/>
+            </a:solidFill>
+            <a:prstDash val="solid"/>
+          </a:ln>
+        </p:spPr>
+      </p:sp>
+      <p:sp>
+        <p:nvSpPr>
+          <p:cNvPr id="17" name="Text 15"/>
+          <p:cNvSpPr txBox="1"/>
+          <p:nvPr/>
+        </p:nvSpPr>
+        <p:spPr>
+          <a:xfrm>
+            <a:off x="457200" y="3666744"/>
+            <a:ext cx="310896" cy="310896"/>
+          </a:xfrm>
+          <a:prstGeom prst="rect">
+            <a:avLst/>
+          </a:prstGeom>
+          <a:noFill/>
+          <a:ln/>
+        </p:spPr>
+        <p:txBody>
+          <a:bodyPr wrap="square" lIns="0" tIns="0" rIns="0" bIns="0" rtlCol="0" anchor="ctr"/>
+          <a:lstStyle/>
+          <a:p>
+            <a:pPr algn="ctr" indent="0" marL="0">
+              <a:buNone/>
+            </a:pPr>
+            <a:r>
+              <a:rPr lang="en-US" sz="1100" b="1" dirty="0">
+                <a:solidFill>
+                  <a:srgbClr val="FFFFFF"/>
+                </a:solidFill>
+                <a:latin typeface="Consolas" pitchFamily="34" charset="0"/>
+                <a:ea typeface="Consolas" pitchFamily="34" charset="-122"/>
+                <a:cs typeface="Consolas" pitchFamily="34" charset="-120"/>
+              </a:rPr>
+              <a:t>4</a:t>
+            </a:r>
+            <a:endParaRPr lang="en-US" sz="1100" dirty="0"/>
+          </a:p>
+        </p:txBody>
+      </p:sp>
+      <p:sp>
+        <p:nvSpPr>
+          <p:cNvPr id="18" name="Text 16"/>
+          <p:cNvSpPr txBox="1"/>
+          <p:nvPr/>
+        </p:nvSpPr>
+        <p:spPr>
+          <a:xfrm>
+            <a:off x="896112" y="3675888"/>
+            <a:ext cx="3767328" cy="274320"/>
+          </a:xfrm>
+          <a:prstGeom prst="rect">
+            <a:avLst/>
+          </a:prstGeom>
+          <a:noFill/>
+          <a:ln/>
+        </p:spPr>
+        <p:txBody>
+          <a:bodyPr wrap="square" lIns="0" tIns="0" rIns="0" bIns="0" rtlCol="0" anchor="t"/>
+          <a:lstStyle/>
+          <a:p>
+            <a:pPr indent="0" marL="0">
+              <a:buNone/>
+            </a:pPr>
+            <a:r>
+              <a:rPr lang="en-US" sz="1250" b="1" dirty="0">
+                <a:solidFill>
+                  <a:srgbClr val="001E3C"/>
+                </a:solidFill>
+                <a:latin typeface="Meiryo" pitchFamily="34" charset="0"/>
+                <a:ea typeface="Meiryo" pitchFamily="34" charset="-122"/>
+                <a:cs typeface="Meiryo" pitchFamily="34" charset="-120"/>
+              </a:rPr>
+              <a:t>止めるときは ■ ボタン</a:t>
+            </a:r>
+            <a:endParaRPr lang="en-US" sz="1250" dirty="0"/>
+          </a:p>
+        </p:txBody>
+      </p:sp>
+      <p:sp>
+        <p:nvSpPr>
+          <p:cNvPr id="19" name="Text 17"/>
+          <p:cNvSpPr txBox="1"/>
+          <p:nvPr/>
+        </p:nvSpPr>
+        <p:spPr>
+          <a:xfrm>
+            <a:off x="896112" y="3941064"/>
+            <a:ext cx="3767328" cy="457200"/>
+          </a:xfrm>
+          <a:prstGeom prst="rect">
+            <a:avLst/>
+          </a:prstGeom>
+          <a:noFill/>
+          <a:ln/>
+        </p:spPr>
+        <p:txBody>
+          <a:bodyPr wrap="square" lIns="0" tIns="0" rIns="0" bIns="0" rtlCol="0" anchor="t"/>
+          <a:lstStyle/>
+          <a:p>
+            <a:pPr indent="0" marL="0">
+              <a:buNone/>
+            </a:pPr>
+            <a:r>
+              <a:rPr lang="en-US" sz="1050" dirty="0">
+                <a:solidFill>
+                  <a:srgbClr val="1B2B3A"/>
+                </a:solidFill>
+                <a:latin typeface="Meiryo" pitchFamily="34" charset="0"/>
+                <a:ea typeface="Meiryo" pitchFamily="34" charset="-122"/>
+                <a:cs typeface="Meiryo" pitchFamily="34" charset="-120"/>
+              </a:rPr>
+              <a:t>または Shift + F5</a:t>
+            </a:r>
+            <a:endParaRPr lang="en-US" sz="1050" dirty="0"/>
+          </a:p>
+        </p:txBody>
+      </p:sp>
+      <p:sp>
+        <p:nvSpPr>
+          <p:cNvPr id="20" name="Shape 18"/>
+          <p:cNvSpPr/>
+          <p:nvPr/>
+        </p:nvSpPr>
+        <p:spPr>
+          <a:xfrm>
+            <a:off x="4937760" y="1417320"/>
+            <a:ext cx="3749040" cy="3017520"/>
+          </a:xfrm>
+          <a:prstGeom prst="rect">
+            <a:avLst/>
+          </a:prstGeom>
+          <a:solidFill>
+            <a:srgbClr val="1F1F1F"/>
+          </a:solidFill>
+          <a:ln w="12700">
+            <a:solidFill>
+              <a:srgbClr val="3C3C3C"/>
+            </a:solidFill>
+            <a:prstDash val="solid"/>
+          </a:ln>
+          <a:effectLst>
+            <a:outerShdw sx="100000" sy="100000" kx="0" ky="0" algn="bl" rotWithShape="0" blurRad="76200" dist="25400" dir="5400000">
+              <a:srgbClr val="000000">
+                <a:alpha val="12000"/>
+              </a:srgbClr>
+            </a:outerShdw>
+          </a:effectLst>
+        </p:spPr>
+      </p:sp>
+      <p:sp>
+        <p:nvSpPr>
+          <p:cNvPr id="21" name="Shape 19"/>
+          <p:cNvSpPr/>
+          <p:nvPr/>
+        </p:nvSpPr>
+        <p:spPr>
+          <a:xfrm>
+            <a:off x="4937760" y="1417320"/>
+            <a:ext cx="3749040" cy="274320"/>
+          </a:xfrm>
+          <a:prstGeom prst="rect">
+            <a:avLst/>
+          </a:prstGeom>
+          <a:solidFill>
+            <a:srgbClr val="3C3C3C"/>
+          </a:solidFill>
+          <a:ln w="12700">
+            <a:solidFill>
+              <a:srgbClr val="3C3C3C"/>
+            </a:solidFill>
+            <a:prstDash val="solid"/>
+          </a:ln>
+        </p:spPr>
+      </p:sp>
+      <p:sp>
+        <p:nvSpPr>
+          <p:cNvPr id="22" name="Shape 20"/>
+          <p:cNvSpPr/>
+          <p:nvPr/>
+        </p:nvSpPr>
+        <p:spPr>
+          <a:xfrm>
+            <a:off x="5065776" y="1508760"/>
+            <a:ext cx="91440" cy="91440"/>
+          </a:xfrm>
+          <a:prstGeom prst="ellipse">
+            <a:avLst/>
+          </a:prstGeom>
+          <a:solidFill>
+            <a:srgbClr val="FF5F57"/>
+          </a:solidFill>
+          <a:ln w="12700">
+            <a:solidFill>
+              <a:srgbClr val="FF5F57"/>
+            </a:solidFill>
+            <a:prstDash val="solid"/>
+          </a:ln>
+        </p:spPr>
+      </p:sp>
+      <p:sp>
+        <p:nvSpPr>
+          <p:cNvPr id="23" name="Shape 21"/>
+          <p:cNvSpPr/>
+          <p:nvPr/>
+        </p:nvSpPr>
+        <p:spPr>
+          <a:xfrm>
+            <a:off x="5230368" y="1508760"/>
+            <a:ext cx="91440" cy="91440"/>
+          </a:xfrm>
+          <a:prstGeom prst="ellipse">
+            <a:avLst/>
+          </a:prstGeom>
+          <a:solidFill>
+            <a:srgbClr val="FEBC2E"/>
+          </a:solidFill>
+          <a:ln w="12700">
+            <a:solidFill>
+              <a:srgbClr val="FEBC2E"/>
+            </a:solidFill>
+            <a:prstDash val="solid"/>
+          </a:ln>
+        </p:spPr>
+      </p:sp>
+      <p:sp>
+        <p:nvSpPr>
+          <p:cNvPr id="24" name="Shape 22"/>
+          <p:cNvSpPr/>
+          <p:nvPr/>
+        </p:nvSpPr>
+        <p:spPr>
+          <a:xfrm>
+            <a:off x="5394960" y="1508760"/>
+            <a:ext cx="91440" cy="91440"/>
+          </a:xfrm>
+          <a:prstGeom prst="ellipse">
+            <a:avLst/>
+          </a:prstGeom>
+          <a:solidFill>
+            <a:srgbClr val="28C840"/>
+          </a:solidFill>
+          <a:ln w="12700">
+            <a:solidFill>
+              <a:srgbClr val="28C840"/>
+            </a:solidFill>
+            <a:prstDash val="solid"/>
+          </a:ln>
+        </p:spPr>
+      </p:sp>
+      <p:sp>
+        <p:nvSpPr>
+          <p:cNvPr id="25" name="Text 23"/>
+          <p:cNvSpPr txBox="1"/>
+          <p:nvPr/>
+        </p:nvSpPr>
+        <p:spPr>
+          <a:xfrm>
+            <a:off x="5623560" y="1417320"/>
+            <a:ext cx="2926080" cy="274320"/>
+          </a:xfrm>
+          <a:prstGeom prst="rect">
+            <a:avLst/>
+          </a:prstGeom>
+          <a:noFill/>
+          <a:ln/>
+        </p:spPr>
+        <p:txBody>
+          <a:bodyPr wrap="square" lIns="0" tIns="0" rIns="0" bIns="0" rtlCol="0" anchor="ctr"/>
+          <a:lstStyle/>
+          <a:p>
+            <a:pPr indent="0" marL="0">
+              <a:buNone/>
+            </a:pPr>
+            <a:r>
+              <a:rPr lang="en-US" sz="900" dirty="0">
+                <a:solidFill>
+                  <a:srgbClr val="CCCCCC"/>
+                </a:solidFill>
+                <a:latin typeface="Meiryo" pitchFamily="34" charset="0"/>
+                <a:ea typeface="Meiryo" pitchFamily="34" charset="-122"/>
+                <a:cs typeface="Meiryo" pitchFamily="34" charset="-120"/>
+              </a:rPr>
+              <a:t>VS Code</a:t>
+            </a:r>
+            <a:endParaRPr lang="en-US" sz="900" dirty="0"/>
+          </a:p>
+        </p:txBody>
+      </p:sp>
+      <p:sp>
+        <p:nvSpPr>
+          <p:cNvPr id="26" name="Shape 24"/>
+          <p:cNvSpPr/>
+          <p:nvPr/>
+        </p:nvSpPr>
+        <p:spPr>
+          <a:xfrm>
+            <a:off x="5760720" y="2148840"/>
+            <a:ext cx="2743200" cy="1051560"/>
+          </a:xfrm>
+          <a:prstGeom prst="rect">
+            <a:avLst/>
+          </a:prstGeom>
+          <a:solidFill>
+            <a:srgbClr val="252526"/>
+          </a:solidFill>
+          <a:ln w="12700">
+            <a:solidFill>
+              <a:srgbClr val="454545"/>
+            </a:solidFill>
+            <a:prstDash val="solid"/>
+          </a:ln>
+          <a:effectLst>
+            <a:outerShdw sx="100000" sy="100000" kx="0" ky="0" algn="bl" rotWithShape="0" blurRad="76200" dist="25400" dir="5400000">
+              <a:srgbClr val="000000">
+                <a:alpha val="12000"/>
+              </a:srgbClr>
+            </a:outerShdw>
+          </a:effectLst>
+        </p:spPr>
+      </p:sp>
+      <p:pic>
+        <p:nvPicPr>
+          <p:cNvPr id="27" name="Image 0" descr="preencoded.png">    </p:cNvPr>
+          <p:cNvPicPr>
+            <a:picLocks noChangeAspect="1"/>
+          </p:cNvPicPr>
+          <p:nvPr/>
+        </p:nvPicPr>
+        <p:blipFill>
+          <a:blip r:embed="rId1"/>
+          <a:stretch>
+            <a:fillRect/>
+          </a:stretch>
+        </p:blipFill>
+        <p:spPr>
+          <a:xfrm>
+            <a:off x="5897880" y="2286000"/>
+            <a:ext cx="164592" cy="164592"/>
+          </a:xfrm>
+          <a:prstGeom prst="rect">
+            <a:avLst/>
+          </a:prstGeom>
+        </p:spPr>
+      </p:pic>
+      <p:sp>
+        <p:nvSpPr>
+          <p:cNvPr id="28" name="Text 25"/>
+          <p:cNvSpPr txBox="1"/>
+          <p:nvPr/>
+        </p:nvSpPr>
+        <p:spPr>
+          <a:xfrm>
+            <a:off x="6144768" y="2240280"/>
+            <a:ext cx="2286000" cy="457200"/>
+          </a:xfrm>
+          <a:prstGeom prst="rect">
+            <a:avLst/>
+          </a:prstGeom>
+          <a:noFill/>
+          <a:ln/>
+        </p:spPr>
+        <p:txBody>
+          <a:bodyPr wrap="square" lIns="0" tIns="0" rIns="0" bIns="0" rtlCol="0" anchor="t"/>
+          <a:lstStyle/>
+          <a:p>
+            <a:pPr indent="0" marL="0">
+              <a:buNone/>
+            </a:pPr>
+            <a:r>
+              <a:rPr lang="en-US" sz="900" dirty="0">
+                <a:solidFill>
+                  <a:srgbClr val="CCCCCC"/>
+                </a:solidFill>
+                <a:latin typeface="Meiryo" pitchFamily="34" charset="0"/>
+                <a:ea typeface="Meiryo" pitchFamily="34" charset="-122"/>
+                <a:cs typeface="Meiryo" pitchFamily="34" charset="-120"/>
+              </a:rPr>
+              <a:t>ポート 8000 で実行されているアプリケーションは使用可能です。</a:t>
+            </a:r>
+            <a:endParaRPr lang="en-US" sz="900" dirty="0"/>
+          </a:p>
+        </p:txBody>
+      </p:sp>
+      <p:sp>
+        <p:nvSpPr>
+          <p:cNvPr id="29" name="Shape 26"/>
+          <p:cNvSpPr/>
+          <p:nvPr/>
+        </p:nvSpPr>
+        <p:spPr>
+          <a:xfrm>
+            <a:off x="7452360" y="2807208"/>
+            <a:ext cx="1005840" cy="274320"/>
+          </a:xfrm>
+          <a:prstGeom prst="rect">
+            <a:avLst/>
+          </a:prstGeom>
+          <a:solidFill>
+            <a:srgbClr val="0078D4"/>
+          </a:solidFill>
+          <a:ln w="12700">
+            <a:solidFill>
+              <a:srgbClr val="0078D4"/>
+            </a:solidFill>
+            <a:prstDash val="solid"/>
+          </a:ln>
+        </p:spPr>
+      </p:sp>
+      <p:sp>
+        <p:nvSpPr>
+          <p:cNvPr id="30" name="Text 27"/>
+          <p:cNvSpPr txBox="1"/>
+          <p:nvPr/>
+        </p:nvSpPr>
+        <p:spPr>
+          <a:xfrm>
+            <a:off x="7452360" y="2807208"/>
+            <a:ext cx="1005840" cy="274320"/>
+          </a:xfrm>
+          <a:prstGeom prst="rect">
+            <a:avLst/>
+          </a:prstGeom>
+          <a:noFill/>
+          <a:ln/>
+        </p:spPr>
+        <p:txBody>
+          <a:bodyPr wrap="square" lIns="0" tIns="0" rIns="0" bIns="0" rtlCol="0" anchor="ctr"/>
+          <a:lstStyle/>
+          <a:p>
+            <a:pPr algn="ctr" indent="0" marL="0">
+              <a:buNone/>
+            </a:pPr>
+            <a:r>
+              <a:rPr lang="en-US" sz="850" dirty="0">
+                <a:solidFill>
+                  <a:srgbClr val="FFFFFF"/>
+                </a:solidFill>
+                <a:latin typeface="Meiryo" pitchFamily="34" charset="0"/>
+                <a:ea typeface="Meiryo" pitchFamily="34" charset="-122"/>
+                <a:cs typeface="Meiryo" pitchFamily="34" charset="-120"/>
+              </a:rPr>
+              <a:t>ブラウザーで開く</a:t>
+            </a:r>
+            <a:endParaRPr lang="en-US" sz="850" dirty="0"/>
+          </a:p>
+        </p:txBody>
+      </p:sp>
+      <p:sp>
+        <p:nvSpPr>
+          <p:cNvPr id="31" name="Shape 28"/>
+          <p:cNvSpPr/>
+          <p:nvPr/>
+        </p:nvSpPr>
+        <p:spPr>
+          <a:xfrm>
+            <a:off x="5120640" y="3383280"/>
+            <a:ext cx="3383280" cy="640080"/>
+          </a:xfrm>
+          <a:prstGeom prst="rect">
+            <a:avLst/>
+          </a:prstGeom>
+          <a:solidFill>
+            <a:srgbClr val="181818"/>
+          </a:solidFill>
+          <a:ln w="12700">
+            <a:solidFill>
+              <a:srgbClr val="333333"/>
+            </a:solidFill>
+            <a:prstDash val="solid"/>
+          </a:ln>
+        </p:spPr>
+      </p:sp>
+      <p:sp>
+        <p:nvSpPr>
+          <p:cNvPr id="32" name="Text 29"/>
+          <p:cNvSpPr txBox="1"/>
+          <p:nvPr/>
+        </p:nvSpPr>
+        <p:spPr>
+          <a:xfrm>
+            <a:off x="5212080" y="3429000"/>
+            <a:ext cx="3200400" cy="548640"/>
+          </a:xfrm>
+          <a:prstGeom prst="rect">
+            <a:avLst/>
+          </a:prstGeom>
+          <a:noFill/>
+          <a:ln/>
+        </p:spPr>
+        <p:txBody>
+          <a:bodyPr wrap="square" lIns="0" tIns="0" rIns="0" bIns="0" rtlCol="0" anchor="ctr"/>
+          <a:lstStyle/>
+          <a:p>
+            <a:pPr indent="0" marL="0">
+              <a:buNone/>
+            </a:pPr>
+            <a:r>
+              <a:rPr lang="en-US" sz="850" dirty="0">
+                <a:solidFill>
+                  <a:srgbClr val="CCCCCC"/>
+                </a:solidFill>
+                <a:latin typeface="Consolas" pitchFamily="34" charset="0"/>
+                <a:ea typeface="Consolas" pitchFamily="34" charset="-122"/>
+                <a:cs typeface="Consolas" pitchFamily="34" charset="-120"/>
+              </a:rPr>
+              <a:t>Starting development server at http://127.0.0.1:8000/</a:t>
+            </a:r>
+            <a:endParaRPr lang="en-US" sz="850" dirty="0"/>
+          </a:p>
+        </p:txBody>
+      </p:sp>
+      <p:sp>
+        <p:nvSpPr>
+          <p:cNvPr id="33" name="Shape 30"/>
+          <p:cNvSpPr/>
+          <p:nvPr/>
+        </p:nvSpPr>
+        <p:spPr>
+          <a:xfrm>
+            <a:off x="4937760" y="4160520"/>
+            <a:ext cx="3749040" cy="274320"/>
+          </a:xfrm>
+          <a:prstGeom prst="rect">
+            <a:avLst/>
+          </a:prstGeom>
+          <a:solidFill>
+            <a:srgbClr val="181818"/>
+          </a:solidFill>
+          <a:ln w="12700">
+            <a:solidFill>
+              <a:srgbClr val="181818"/>
+            </a:solidFill>
+            <a:prstDash val="solid"/>
+          </a:ln>
+        </p:spPr>
+      </p:sp>
+      <p:sp>
+        <p:nvSpPr>
+          <p:cNvPr id="34" name="Shape 31"/>
+          <p:cNvSpPr/>
+          <p:nvPr/>
+        </p:nvSpPr>
+        <p:spPr>
+          <a:xfrm>
+            <a:off x="4937760" y="4160520"/>
+            <a:ext cx="2377440" cy="274320"/>
+          </a:xfrm>
+          <a:prstGeom prst="rect">
+            <a:avLst/>
+          </a:prstGeom>
+          <a:solidFill>
+            <a:srgbClr val="0078D4"/>
+          </a:solidFill>
+          <a:ln w="12700">
+            <a:solidFill>
+              <a:srgbClr val="0078D4"/>
+            </a:solidFill>
+            <a:prstDash val="solid"/>
+          </a:ln>
+        </p:spPr>
+      </p:sp>
+      <p:sp>
+        <p:nvSpPr>
+          <p:cNvPr id="35" name="Text 32"/>
+          <p:cNvSpPr txBox="1"/>
+          <p:nvPr/>
+        </p:nvSpPr>
+        <p:spPr>
+          <a:xfrm>
+            <a:off x="5029200" y="4160520"/>
+            <a:ext cx="2286000" cy="274320"/>
+          </a:xfrm>
+          <a:prstGeom prst="rect">
+            <a:avLst/>
+          </a:prstGeom>
+          <a:noFill/>
+          <a:ln/>
+        </p:spPr>
+        <p:txBody>
+          <a:bodyPr wrap="square" lIns="0" tIns="0" rIns="0" bIns="0" rtlCol="0" anchor="ctr"/>
+          <a:lstStyle/>
+          <a:p>
+            <a:pPr indent="0" marL="0">
+              <a:buNone/>
+            </a:pPr>
+            <a:r>
+              <a:rPr lang="en-US" sz="900" dirty="0">
+                <a:solidFill>
+                  <a:srgbClr val="FFFFFF"/>
+                </a:solidFill>
+                <a:latin typeface="Meiryo" pitchFamily="34" charset="0"/>
+                <a:ea typeface="Meiryo" pitchFamily="34" charset="-122"/>
+                <a:cs typeface="Meiryo" pitchFamily="34" charset="-120"/>
+              </a:rPr>
+              <a:t>&gt;&lt; 開発コンテナー: funITclub WG</a:t>
+            </a:r>
+            <a:endParaRPr lang="en-US" sz="900" dirty="0"/>
+          </a:p>
+        </p:txBody>
+      </p:sp>
+      <p:sp>
+        <p:nvSpPr>
+          <p:cNvPr id="36" name="Text 33"/>
+          <p:cNvSpPr txBox="1"/>
+          <p:nvPr/>
+        </p:nvSpPr>
+        <p:spPr>
+          <a:xfrm>
+            <a:off x="457200" y="4572000"/>
+            <a:ext cx="8229600" cy="365760"/>
+          </a:xfrm>
+          <a:prstGeom prst="rect">
+            <a:avLst/>
+          </a:prstGeom>
+          <a:noFill/>
+          <a:ln/>
+        </p:spPr>
+        <p:txBody>
+          <a:bodyPr wrap="square" lIns="0" tIns="0" rIns="0" bIns="0" rtlCol="0" anchor="t"/>
+          <a:lstStyle/>
+          <a:p>
+            <a:pPr indent="0" marL="0">
+              <a:buNone/>
+            </a:pPr>
+            <a:r>
+              <a:rPr lang="en-US" sz="1050" dirty="0">
+                <a:solidFill>
+                  <a:srgbClr val="5A6B7B"/>
+                </a:solidFill>
+                <a:latin typeface="Meiryo" pitchFamily="34" charset="0"/>
+                <a:ea typeface="Meiryo" pitchFamily="34" charset="-122"/>
+                <a:cs typeface="Meiryo" pitchFamily="34" charset="-120"/>
+              </a:rPr>
+              <a:t>サイトが表示されたら準備は終わり。毎日の作業は資料 03「開発の進め方」へ。</a:t>
+            </a:r>
+            <a:endParaRPr lang="en-US" sz="1050" dirty="0"/>
+          </a:p>
+        </p:txBody>
+      </p:sp>
+    </p:spTree>
+  </p:cSld>
+  <p:clrMapOvr>
+    <a:masterClrMapping/>
+  </p:clrMapOvr>
+</p:sld>
+</file>
+
+<file path=ppt/slides/slide13.xml><?xml version="1.0" encoding="utf-8"?>
+<p:sld xmlns:a="http://schemas.openxmlformats.org/drawingml/2006/main" xmlns:r="http://schemas.openxmlformats.org/officeDocument/2006/relationships" xmlns:p="http://schemas.openxmlformats.org/presentationml/2006/main">
+  <p:cSld name="Slide 13">
+    <p:bg>
+      <p:bgPr>
+        <a:solidFill>
+          <a:srgbClr val="F2F5F8"/>
+        </a:solidFill>
+      </p:bgPr>
+    </p:bg>
+    <p:spTree>
+      <p:nvGrpSpPr>
+        <p:cNvPr id="1" name=""/>
+        <p:cNvGrpSpPr/>
+        <p:nvPr/>
+      </p:nvGrpSpPr>
+      <p:grpSpPr>
+        <a:xfrm>
+          <a:off x="0" y="0"/>
+          <a:ext cx="0" cy="0"/>
+          <a:chOff x="0" y="0"/>
+          <a:chExt cx="0" cy="0"/>
+        </a:xfrm>
+      </p:grpSpPr>
+      <p:sp>
+        <p:nvSpPr>
+          <p:cNvPr id="2" name="Text 0"/>
+          <p:cNvSpPr txBox="1"/>
+          <p:nvPr/>
+        </p:nvSpPr>
+        <p:spPr>
+          <a:xfrm>
+            <a:off x="457200" y="320040"/>
+            <a:ext cx="6858000" cy="274320"/>
+          </a:xfrm>
+          <a:prstGeom prst="rect">
+            <a:avLst/>
+          </a:prstGeom>
+          <a:noFill/>
+          <a:ln/>
+        </p:spPr>
+        <p:txBody>
+          <a:bodyPr wrap="square" lIns="0" tIns="0" rIns="0" bIns="0" rtlCol="0" anchor="t"/>
+          <a:lstStyle/>
+          <a:p>
+            <a:pPr indent="0" marL="0">
+              <a:buNone/>
+            </a:pPr>
+            <a:r>
+              <a:rPr lang="en-US" sz="1100" dirty="0">
+                <a:solidFill>
+                  <a:srgbClr val="1A4A70"/>
+                </a:solidFill>
+                <a:latin typeface="Consolas" pitchFamily="34" charset="0"/>
+                <a:ea typeface="Consolas" pitchFamily="34" charset="-122"/>
+                <a:cs typeface="Consolas" pitchFamily="34" charset="-120"/>
+              </a:rPr>
+              <a:t>// 02  ·  困ったとき</a:t>
+            </a:r>
+            <a:endParaRPr lang="en-US" sz="1100" dirty="0"/>
+          </a:p>
+        </p:txBody>
+      </p:sp>
+      <p:sp>
+        <p:nvSpPr>
+          <p:cNvPr id="3" name="Text 1"/>
+          <p:cNvSpPr txBox="1"/>
+          <p:nvPr/>
+        </p:nvSpPr>
+        <p:spPr>
+          <a:xfrm>
+            <a:off x="457200" y="594360"/>
+            <a:ext cx="8229600" cy="594360"/>
+          </a:xfrm>
+          <a:prstGeom prst="rect">
+            <a:avLst/>
+          </a:prstGeom>
+          <a:noFill/>
+          <a:ln/>
+        </p:spPr>
+        <p:txBody>
+          <a:bodyPr wrap="square" lIns="0" tIns="0" rIns="0" bIns="0" rtlCol="0" anchor="ctr"/>
+          <a:lstStyle/>
+          <a:p>
+            <a:pPr indent="0" marL="0">
+              <a:buNone/>
+            </a:pPr>
+            <a:r>
+              <a:rPr lang="en-US" sz="2600" b="1" dirty="0">
+                <a:solidFill>
+                  <a:srgbClr val="001E3C"/>
+                </a:solidFill>
+                <a:latin typeface="Meiryo" pitchFamily="34" charset="0"/>
+                <a:ea typeface="Meiryo" pitchFamily="34" charset="-122"/>
+                <a:cs typeface="Meiryo" pitchFamily="34" charset="-120"/>
+              </a:rPr>
               <a:t>よくあるつまずき</a:t>
             </a:r>
             <a:endParaRPr lang="en-US" sz="2600" dirty="0"/>
@@ -5307,7 +7322,7 @@
       </p:sp>
       <p:graphicFrame>
         <p:nvGraphicFramePr>
-          <p:cNvPr id="13" name="Table 0"/>
+          <p:cNvPr id="14" name="Table 0"/>
           <p:cNvGraphicFramePr>
             <a:graphicFrameLocks noGrp="1"/>
           </p:cNvGraphicFramePr>
@@ -7586,7 +9601,7 @@
                 <a:ea typeface="Meiryo" pitchFamily="34" charset="-122"/>
                 <a:cs typeface="Meiryo" pitchFamily="34" charset="-120"/>
               </a:rPr>
-              <a:t>リポジトリを開く</a:t>
+              <a:t>リポジトリをクローンする</a:t>
             </a:r>
             <a:endParaRPr lang="en-US" sz="1300" dirty="0"/>
           </a:p>
@@ -7625,7 +9640,7 @@
                 <a:ea typeface="Meiryo" pitchFamily="34" charset="-122"/>
                 <a:cs typeface="Meiryo" pitchFamily="34" charset="-120"/>
               </a:rPr>
-              <a:t>作業部屋が自動でできる</a:t>
+              <a:t>GitHub から作業部屋に写す</a:t>
             </a:r>
             <a:endParaRPr lang="en-US" sz="950" dirty="0"/>
           </a:p>

--- a/docs/WG立ち上げガイド/02_パソコンの準備.pptx
+++ b/docs/WG立ち上げガイド/02_パソコンの準備.pptx
@@ -4662,7 +4662,7 @@
                 <a:ea typeface="Meiryo" pitchFamily="34" charset="-122"/>
                 <a:cs typeface="Meiryo" pitchFamily="34" charset="-120"/>
               </a:rPr>
-              <a:t>リポジトリの名前は WG のチームと同じ（例：wg-protein）。分からなければ WG の仲間か運営に聞く。</a:t>
+              <a:t>URL は「WG に参加」の完了画面と確認のメールにも出ている（名前は WG のチームと同じ。例：wg-protein）。</a:t>
             </a:r>
             <a:endParaRPr lang="en-US" sz="1050" dirty="0"/>
           </a:p>

--- a/docs/WG立ち上げガイド/02_パソコンの準備.pptx
+++ b/docs/WG立ち上げガイド/02_パソコンの準備.pptx
@@ -6005,6 +6005,45 @@
                 <a:cs typeface="Consolas" pitchFamily="34" charset="-120"/>
               </a:rPr>
               <a:t>F5 でサイトを起動できます。</a:t>
+            </a:r>
+            <a:endParaRPr lang="en-US" sz="1050" dirty="0"/>
+          </a:p>
+        </p:txBody>
+      </p:sp>
+      <p:sp>
+        <p:nvSpPr>
+          <p:cNvPr id="40" name="Text 38"/>
+          <p:cNvSpPr txBox="1"/>
+          <p:nvPr/>
+        </p:nvSpPr>
+        <p:spPr>
+          <a:xfrm>
+            <a:off x="457200" y="4681728"/>
+            <a:ext cx="8229600" cy="365760"/>
+          </a:xfrm>
+          <a:prstGeom prst="rect">
+            <a:avLst/>
+          </a:prstGeom>
+          <a:noFill/>
+          <a:ln/>
+        </p:spPr>
+        <p:txBody>
+          <a:bodyPr wrap="square" lIns="0" tIns="0" rIns="0" bIns="0" rtlCol="0" anchor="t"/>
+          <a:lstStyle/>
+          <a:p>
+            <a:pPr indent="0" marL="0">
+              <a:buNone/>
+            </a:pPr>
+            <a:r>
+              <a:rPr lang="en-US" sz="1050" dirty="0">
+                <a:solidFill>
+                  <a:srgbClr val="5A6B7B"/>
+                </a:solidFill>
+                <a:latin typeface="Meiryo" pitchFamily="34" charset="0"/>
+                <a:ea typeface="Meiryo" pitchFamily="34" charset="-122"/>
+                <a:cs typeface="Meiryo" pitchFamily="34" charset="-120"/>
+              </a:rPr>
+              <a:t>非公開のリポジトリなので、初回は GitHub へのサインインを求められる。「許可」を押し、ブラウザで Authorize を押す。</a:t>
             </a:r>
             <a:endParaRPr lang="en-US" sz="1050" dirty="0"/>
           </a:p>

--- a/docs/WG立ち上げガイド/02_パソコンの準備.pptx
+++ b/docs/WG立ち上げガイド/02_パソコンの準備.pptx
@@ -16809,7 +16809,7 @@
                 <a:ea typeface="Meiryo" pitchFamily="34" charset="-122"/>
                 <a:cs typeface="Meiryo" pitchFamily="34" charset="-120"/>
               </a:rPr>
-              <a:t>"…" の中は自分の GitHub ユーザー名と、手順 2 でコピーした noreply のアドレス</a:t>
+              <a:t>引用符の中は、自分の GitHub のユーザー名と、手順 2 でコピーした noreply のアドレスに置き換える</a:t>
             </a:r>
             <a:endParaRPr lang="en-US" sz="900" dirty="0"/>
           </a:p>
